--- a/Mapped Curriculum Lessons/Grade 8/Lesson 32 - Functions/Functions - Slides.pptx
+++ b/Mapped Curriculum Lessons/Grade 8/Lesson 32 - Functions/Functions - Slides.pptx
@@ -2,28 +2,28 @@
 <file path=ppt/presentation.xml><?xml version="1.0" encoding="utf-8"?>
 <p:presentation xmlns:p="http://schemas.openxmlformats.org/presentationml/2006/main" embedTrueTypeFonts="1" saveSubsetFonts="0">
   <p:sldMasterIdLst>
-    <p:sldMasterId xmlns:r="http://schemas.openxmlformats.org/officeDocument/2006/relationships" id="2147483648" r:id="Rb1b4be22609f47fa"/>
+    <p:sldMasterId xmlns:r="http://schemas.openxmlformats.org/officeDocument/2006/relationships" id="2147483648" r:id="R31ac1c1c6c064af5"/>
   </p:sldMasterIdLst>
   <p:notesMasterIdLst>
-    <p:notesMasterId xmlns:r="http://schemas.openxmlformats.org/officeDocument/2006/relationships" r:id="Rdf7625a0cdf14871"/>
+    <p:notesMasterId xmlns:r="http://schemas.openxmlformats.org/officeDocument/2006/relationships" r:id="R4825fd6e60bb464f"/>
   </p:notesMasterIdLst>
   <p:sldIdLst>
-    <p:sldId xmlns:r="http://schemas.openxmlformats.org/officeDocument/2006/relationships" id="256" r:id="R66375c1d26504e23"/>
-    <p:sldId xmlns:r="http://schemas.openxmlformats.org/officeDocument/2006/relationships" id="257" r:id="Rb0229df428484db8"/>
-    <p:sldId xmlns:r="http://schemas.openxmlformats.org/officeDocument/2006/relationships" id="258" r:id="R93420375da6e4f94"/>
-    <p:sldId xmlns:r="http://schemas.openxmlformats.org/officeDocument/2006/relationships" id="259" r:id="Rc92210fb09014cb2"/>
-    <p:sldId xmlns:r="http://schemas.openxmlformats.org/officeDocument/2006/relationships" id="260" r:id="R19f45cc1587d463f"/>
-    <p:sldId xmlns:r="http://schemas.openxmlformats.org/officeDocument/2006/relationships" id="261" r:id="Rd52dafb8f29c4309"/>
-    <p:sldId xmlns:r="http://schemas.openxmlformats.org/officeDocument/2006/relationships" id="262" r:id="R458dca51f0f245d8"/>
-    <p:sldId xmlns:r="http://schemas.openxmlformats.org/officeDocument/2006/relationships" id="263" r:id="Rd1819c1928044c1d"/>
-    <p:sldId xmlns:r="http://schemas.openxmlformats.org/officeDocument/2006/relationships" id="264" r:id="R864a22f716724053"/>
+    <p:sldId xmlns:r="http://schemas.openxmlformats.org/officeDocument/2006/relationships" id="256" r:id="Rf00c603fa0104bed"/>
+    <p:sldId xmlns:r="http://schemas.openxmlformats.org/officeDocument/2006/relationships" id="257" r:id="R24caa167a130446d"/>
+    <p:sldId xmlns:r="http://schemas.openxmlformats.org/officeDocument/2006/relationships" id="258" r:id="R157c3231d9bd46f1"/>
+    <p:sldId xmlns:r="http://schemas.openxmlformats.org/officeDocument/2006/relationships" id="259" r:id="Rffdadcf27df84337"/>
+    <p:sldId xmlns:r="http://schemas.openxmlformats.org/officeDocument/2006/relationships" id="260" r:id="Rd853e3bbf4ee4769"/>
+    <p:sldId xmlns:r="http://schemas.openxmlformats.org/officeDocument/2006/relationships" id="261" r:id="R66219515668245c3"/>
+    <p:sldId xmlns:r="http://schemas.openxmlformats.org/officeDocument/2006/relationships" id="262" r:id="R3e0d086e7fad4529"/>
+    <p:sldId xmlns:r="http://schemas.openxmlformats.org/officeDocument/2006/relationships" id="263" r:id="R52860938eede4e32"/>
+    <p:sldId xmlns:r="http://schemas.openxmlformats.org/officeDocument/2006/relationships" id="264" r:id="R678058c79a5b49e1"/>
   </p:sldIdLst>
   <p:sldSz cx="12192000" cy="6858000"/>
   <p:notesSz cx="6858000" cy="9144000"/>
   <p:embeddedFontLst>
     <p:embeddedFont>
       <p:font typeface="JetBrains Mono"/>
-      <p:regular xmlns:r="http://schemas.openxmlformats.org/officeDocument/2006/relationships" r:id="R06ec2ae1daa1435a"/>
+      <p:regular xmlns:r="http://schemas.openxmlformats.org/officeDocument/2006/relationships" r:id="R06f8e60a513842b6"/>
     </p:embeddedFont>
   </p:embeddedFontLst>
 </p:presentation>
@@ -1071,7 +1071,7 @@
           <p:nvPr/>
         </p:nvPicPr>
         <p:blipFill rotWithShape="1">
-          <a:blip xmlns:r="http://schemas.openxmlformats.org/officeDocument/2006/relationships" xmlns:a="http://schemas.openxmlformats.org/drawingml/2006/main" r:embed="R3da09579b8a64fe1"/>
+          <a:blip xmlns:r="http://schemas.openxmlformats.org/officeDocument/2006/relationships" xmlns:a="http://schemas.openxmlformats.org/drawingml/2006/main" r:embed="R60f98c0e2bf247cd"/>
           <a:stretch xmlns:a="http://schemas.openxmlformats.org/drawingml/2006/main"/>
         </p:blipFill>
         <p:spPr>
@@ -1451,7 +1451,7 @@
           <p:nvPr/>
         </p:nvPicPr>
         <p:blipFill rotWithShape="1">
-          <a:blip xmlns:r="http://schemas.openxmlformats.org/officeDocument/2006/relationships" xmlns:a="http://schemas.openxmlformats.org/drawingml/2006/main" r:embed="R9d5dfe9365ab4d15">
+          <a:blip xmlns:r="http://schemas.openxmlformats.org/officeDocument/2006/relationships" xmlns:a="http://schemas.openxmlformats.org/drawingml/2006/main" r:embed="Re500e71fcda44865">
             <a:alphaModFix amt="28000"/>
           </a:blip>
           <a:stretch xmlns:a="http://schemas.openxmlformats.org/drawingml/2006/main"/>
@@ -1664,7 +1664,7 @@
           <p:nvPr/>
         </p:nvPicPr>
         <p:blipFill rotWithShape="1">
-          <a:blip xmlns:r="http://schemas.openxmlformats.org/officeDocument/2006/relationships" xmlns:a="http://schemas.openxmlformats.org/drawingml/2006/main" r:embed="R80be485699d74d43">
+          <a:blip xmlns:r="http://schemas.openxmlformats.org/officeDocument/2006/relationships" xmlns:a="http://schemas.openxmlformats.org/drawingml/2006/main" r:embed="R5539c48069a046ff">
             <a:alphaModFix amt="28000"/>
           </a:blip>
           <a:stretch xmlns:a="http://schemas.openxmlformats.org/drawingml/2006/main"/>
@@ -1899,7 +1899,7 @@
           <p:nvPr/>
         </p:nvPicPr>
         <p:blipFill rotWithShape="1">
-          <a:blip xmlns:r="http://schemas.openxmlformats.org/officeDocument/2006/relationships" xmlns:a="http://schemas.openxmlformats.org/drawingml/2006/main" r:embed="Rfd88ecfb563242de">
+          <a:blip xmlns:r="http://schemas.openxmlformats.org/officeDocument/2006/relationships" xmlns:a="http://schemas.openxmlformats.org/drawingml/2006/main" r:embed="R855e432ad19842de">
             <a:alphaModFix amt="28000"/>
           </a:blip>
           <a:stretch xmlns:a="http://schemas.openxmlformats.org/drawingml/2006/main"/>
@@ -2176,7 +2176,7 @@
           <p:nvPr/>
         </p:nvPicPr>
         <p:blipFill rotWithShape="1">
-          <a:blip xmlns:r="http://schemas.openxmlformats.org/officeDocument/2006/relationships" xmlns:a="http://schemas.openxmlformats.org/drawingml/2006/main" r:embed="Rfe3535c911514c67">
+          <a:blip xmlns:r="http://schemas.openxmlformats.org/officeDocument/2006/relationships" xmlns:a="http://schemas.openxmlformats.org/drawingml/2006/main" r:embed="R7149699bba934079">
             <a:alphaModFix amt="28000"/>
           </a:blip>
           <a:stretch xmlns:a="http://schemas.openxmlformats.org/drawingml/2006/main"/>
@@ -2451,7 +2451,7 @@
           <p:nvPr/>
         </p:nvPicPr>
         <p:blipFill rotWithShape="1">
-          <a:blip xmlns:r="http://schemas.openxmlformats.org/officeDocument/2006/relationships" xmlns:a="http://schemas.openxmlformats.org/drawingml/2006/main" r:embed="Rd45164ce60484fcd">
+          <a:blip xmlns:r="http://schemas.openxmlformats.org/officeDocument/2006/relationships" xmlns:a="http://schemas.openxmlformats.org/drawingml/2006/main" r:embed="Rc04bd1dc004a457d">
             <a:alphaModFix amt="28000"/>
           </a:blip>
           <a:stretch xmlns:a="http://schemas.openxmlformats.org/drawingml/2006/main"/>
@@ -2875,7 +2875,7 @@
           <p:nvPr/>
         </p:nvPicPr>
         <p:blipFill rotWithShape="1">
-          <a:blip xmlns:r="http://schemas.openxmlformats.org/officeDocument/2006/relationships" xmlns:a="http://schemas.openxmlformats.org/drawingml/2006/main" r:embed="R70c83314f6cd43d8">
+          <a:blip xmlns:r="http://schemas.openxmlformats.org/officeDocument/2006/relationships" xmlns:a="http://schemas.openxmlformats.org/drawingml/2006/main" r:embed="R0dce24be23584f95">
             <a:alphaModFix amt="28000"/>
           </a:blip>
           <a:stretch xmlns:a="http://schemas.openxmlformats.org/drawingml/2006/main"/>
@@ -3016,7 +3016,7 @@
           <p:nvPr/>
         </p:nvPicPr>
         <p:blipFill rotWithShape="1">
-          <a:blip xmlns:r="http://schemas.openxmlformats.org/officeDocument/2006/relationships" xmlns:a="http://schemas.openxmlformats.org/drawingml/2006/main" r:embed="Rbf070952fef34da2">
+          <a:blip xmlns:r="http://schemas.openxmlformats.org/officeDocument/2006/relationships" xmlns:a="http://schemas.openxmlformats.org/drawingml/2006/main" r:embed="R17bf4e8927734358">
             <a:alphaModFix amt="28000"/>
           </a:blip>
           <a:stretch xmlns:a="http://schemas.openxmlformats.org/drawingml/2006/main"/>
@@ -3130,7 +3130,7 @@
           <p:nvPr/>
         </p:nvPicPr>
         <p:blipFill rotWithShape="1">
-          <a:blip xmlns:r="http://schemas.openxmlformats.org/officeDocument/2006/relationships" xmlns:a="http://schemas.openxmlformats.org/drawingml/2006/main" r:embed="R88e67252f4874da7">
+          <a:blip xmlns:r="http://schemas.openxmlformats.org/officeDocument/2006/relationships" xmlns:a="http://schemas.openxmlformats.org/drawingml/2006/main" r:embed="R861a6a29c4e94386">
             <a:alphaModFix amt="28000"/>
           </a:blip>
           <a:stretch xmlns:a="http://schemas.openxmlformats.org/drawingml/2006/main"/>
@@ -3457,7 +3457,7 @@
           <p:nvPr/>
         </p:nvPicPr>
         <p:blipFill rotWithShape="1">
-          <a:blip xmlns:r="http://schemas.openxmlformats.org/officeDocument/2006/relationships" xmlns:a="http://schemas.openxmlformats.org/drawingml/2006/main" r:embed="R27b0510d8a734fa9">
+          <a:blip xmlns:r="http://schemas.openxmlformats.org/officeDocument/2006/relationships" xmlns:a="http://schemas.openxmlformats.org/drawingml/2006/main" r:embed="R8c6601f174844c6d">
             <a:alphaModFix amt="28000"/>
           </a:blip>
           <a:stretch xmlns:a="http://schemas.openxmlformats.org/drawingml/2006/main"/>
@@ -3745,7 +3745,7 @@
           <p:nvPr/>
         </p:nvPicPr>
         <p:blipFill rotWithShape="1">
-          <a:blip xmlns:r="http://schemas.openxmlformats.org/officeDocument/2006/relationships" xmlns:a="http://schemas.openxmlformats.org/drawingml/2006/main" r:embed="R8da162526e644d4f">
+          <a:blip xmlns:r="http://schemas.openxmlformats.org/officeDocument/2006/relationships" xmlns:a="http://schemas.openxmlformats.org/drawingml/2006/main" r:embed="R3819194a77ab41d8">
             <a:alphaModFix amt="28000"/>
           </a:blip>
           <a:stretch xmlns:a="http://schemas.openxmlformats.org/drawingml/2006/main"/>
@@ -3982,17 +3982,17 @@
   </p:cSld>
   <p:clrMap bg1="lt1" tx1="dk1" bg2="lt2" tx2="dk2" accent1="accent1" accent2="accent2" accent3="accent3" accent4="accent4" accent5="accent5" accent6="accent6" hlink="hlink" folHlink="folHlink"/>
   <p:sldLayoutIdLst>
-    <p:sldLayoutId xmlns:r="http://schemas.openxmlformats.org/officeDocument/2006/relationships" id="2147483649" r:id="R070f4628a0e7495a"/>
-    <p:sldLayoutId xmlns:r="http://schemas.openxmlformats.org/officeDocument/2006/relationships" id="2147483650" r:id="R1574b59e6354464a"/>
-    <p:sldLayoutId xmlns:r="http://schemas.openxmlformats.org/officeDocument/2006/relationships" id="2147483651" r:id="R3d9f9717dbea4e17"/>
-    <p:sldLayoutId xmlns:r="http://schemas.openxmlformats.org/officeDocument/2006/relationships" id="2147483652" r:id="Rbf16bead7e554204"/>
-    <p:sldLayoutId xmlns:r="http://schemas.openxmlformats.org/officeDocument/2006/relationships" id="2147483653" r:id="R8975d0726c7743bf"/>
-    <p:sldLayoutId xmlns:r="http://schemas.openxmlformats.org/officeDocument/2006/relationships" id="2147483654" r:id="R7c70313e2eb04853"/>
-    <p:sldLayoutId xmlns:r="http://schemas.openxmlformats.org/officeDocument/2006/relationships" id="2147483655" r:id="R4934cae92fba4336"/>
-    <p:sldLayoutId xmlns:r="http://schemas.openxmlformats.org/officeDocument/2006/relationships" id="2147483656" r:id="R8917b3ad459242d2"/>
-    <p:sldLayoutId xmlns:r="http://schemas.openxmlformats.org/officeDocument/2006/relationships" id="2147483657" r:id="Rdb073d73cb064dc4"/>
-    <p:sldLayoutId xmlns:r="http://schemas.openxmlformats.org/officeDocument/2006/relationships" id="2147483658" r:id="R4278f3b0a6ae46a3"/>
-    <p:sldLayoutId xmlns:r="http://schemas.openxmlformats.org/officeDocument/2006/relationships" id="2147483659" r:id="R20bc3a38a39f423b"/>
+    <p:sldLayoutId xmlns:r="http://schemas.openxmlformats.org/officeDocument/2006/relationships" id="2147483649" r:id="Re7ebf9b6c04e4ac7"/>
+    <p:sldLayoutId xmlns:r="http://schemas.openxmlformats.org/officeDocument/2006/relationships" id="2147483650" r:id="R499efa219cd64193"/>
+    <p:sldLayoutId xmlns:r="http://schemas.openxmlformats.org/officeDocument/2006/relationships" id="2147483651" r:id="R6d25dfa37ebc4006"/>
+    <p:sldLayoutId xmlns:r="http://schemas.openxmlformats.org/officeDocument/2006/relationships" id="2147483652" r:id="R2373baa1272e450d"/>
+    <p:sldLayoutId xmlns:r="http://schemas.openxmlformats.org/officeDocument/2006/relationships" id="2147483653" r:id="R8134b2dc93654162"/>
+    <p:sldLayoutId xmlns:r="http://schemas.openxmlformats.org/officeDocument/2006/relationships" id="2147483654" r:id="R18cf068ae8ec4794"/>
+    <p:sldLayoutId xmlns:r="http://schemas.openxmlformats.org/officeDocument/2006/relationships" id="2147483655" r:id="R79387341364d406d"/>
+    <p:sldLayoutId xmlns:r="http://schemas.openxmlformats.org/officeDocument/2006/relationships" id="2147483656" r:id="R4365016c3df64d0b"/>
+    <p:sldLayoutId xmlns:r="http://schemas.openxmlformats.org/officeDocument/2006/relationships" id="2147483657" r:id="Rb490bf11b6fe44af"/>
+    <p:sldLayoutId xmlns:r="http://schemas.openxmlformats.org/officeDocument/2006/relationships" id="2147483658" r:id="Rbd85f784317e408f"/>
+    <p:sldLayoutId xmlns:r="http://schemas.openxmlformats.org/officeDocument/2006/relationships" id="2147483659" r:id="R3da4c2e9e54a41d0"/>
   </p:sldLayoutIdLst>
   <p:hf hdr="0" ftr="0" dt="0"/>
   <p:txStyles>

--- a/Mapped Curriculum Lessons/Grade 8/Lesson 32 - Functions/Functions - Slides.pptx
+++ b/Mapped Curriculum Lessons/Grade 8/Lesson 32 - Functions/Functions - Slides.pptx
@@ -2,28 +2,28 @@
 <file path=ppt/presentation.xml><?xml version="1.0" encoding="utf-8"?>
 <p:presentation xmlns:p="http://schemas.openxmlformats.org/presentationml/2006/main" embedTrueTypeFonts="1" saveSubsetFonts="0">
   <p:sldMasterIdLst>
-    <p:sldMasterId xmlns:r="http://schemas.openxmlformats.org/officeDocument/2006/relationships" id="2147483648" r:id="R31ac1c1c6c064af5"/>
+    <p:sldMasterId xmlns:r="http://schemas.openxmlformats.org/officeDocument/2006/relationships" id="2147483648" r:id="R2c4e09d8e6424701"/>
   </p:sldMasterIdLst>
   <p:notesMasterIdLst>
-    <p:notesMasterId xmlns:r="http://schemas.openxmlformats.org/officeDocument/2006/relationships" r:id="R4825fd6e60bb464f"/>
+    <p:notesMasterId xmlns:r="http://schemas.openxmlformats.org/officeDocument/2006/relationships" r:id="R7fbacad089cd4494"/>
   </p:notesMasterIdLst>
   <p:sldIdLst>
-    <p:sldId xmlns:r="http://schemas.openxmlformats.org/officeDocument/2006/relationships" id="256" r:id="Rf00c603fa0104bed"/>
-    <p:sldId xmlns:r="http://schemas.openxmlformats.org/officeDocument/2006/relationships" id="257" r:id="R24caa167a130446d"/>
-    <p:sldId xmlns:r="http://schemas.openxmlformats.org/officeDocument/2006/relationships" id="258" r:id="R157c3231d9bd46f1"/>
-    <p:sldId xmlns:r="http://schemas.openxmlformats.org/officeDocument/2006/relationships" id="259" r:id="Rffdadcf27df84337"/>
-    <p:sldId xmlns:r="http://schemas.openxmlformats.org/officeDocument/2006/relationships" id="260" r:id="Rd853e3bbf4ee4769"/>
-    <p:sldId xmlns:r="http://schemas.openxmlformats.org/officeDocument/2006/relationships" id="261" r:id="R66219515668245c3"/>
-    <p:sldId xmlns:r="http://schemas.openxmlformats.org/officeDocument/2006/relationships" id="262" r:id="R3e0d086e7fad4529"/>
-    <p:sldId xmlns:r="http://schemas.openxmlformats.org/officeDocument/2006/relationships" id="263" r:id="R52860938eede4e32"/>
-    <p:sldId xmlns:r="http://schemas.openxmlformats.org/officeDocument/2006/relationships" id="264" r:id="R678058c79a5b49e1"/>
+    <p:sldId xmlns:r="http://schemas.openxmlformats.org/officeDocument/2006/relationships" id="256" r:id="R20377c7fe96240fb"/>
+    <p:sldId xmlns:r="http://schemas.openxmlformats.org/officeDocument/2006/relationships" id="257" r:id="R7ebc6da01ae947df"/>
+    <p:sldId xmlns:r="http://schemas.openxmlformats.org/officeDocument/2006/relationships" id="258" r:id="Rf9553ac868384e23"/>
+    <p:sldId xmlns:r="http://schemas.openxmlformats.org/officeDocument/2006/relationships" id="259" r:id="R67650ac5150a47f7"/>
+    <p:sldId xmlns:r="http://schemas.openxmlformats.org/officeDocument/2006/relationships" id="260" r:id="Re603b22737224b0c"/>
+    <p:sldId xmlns:r="http://schemas.openxmlformats.org/officeDocument/2006/relationships" id="261" r:id="Rcff28c23c61849c8"/>
+    <p:sldId xmlns:r="http://schemas.openxmlformats.org/officeDocument/2006/relationships" id="262" r:id="Rcb47162ad04b4285"/>
+    <p:sldId xmlns:r="http://schemas.openxmlformats.org/officeDocument/2006/relationships" id="263" r:id="Rdff3ba6568594693"/>
+    <p:sldId xmlns:r="http://schemas.openxmlformats.org/officeDocument/2006/relationships" id="264" r:id="R0489eb554b0b440a"/>
   </p:sldIdLst>
   <p:sldSz cx="12192000" cy="6858000"/>
   <p:notesSz cx="6858000" cy="9144000"/>
   <p:embeddedFontLst>
     <p:embeddedFont>
       <p:font typeface="JetBrains Mono"/>
-      <p:regular xmlns:r="http://schemas.openxmlformats.org/officeDocument/2006/relationships" r:id="R06f8e60a513842b6"/>
+      <p:regular xmlns:r="http://schemas.openxmlformats.org/officeDocument/2006/relationships" r:id="R57b10bf0e6d844e7"/>
     </p:embeddedFont>
   </p:embeddedFontLst>
 </p:presentation>
@@ -1071,7 +1071,7 @@
           <p:nvPr/>
         </p:nvPicPr>
         <p:blipFill rotWithShape="1">
-          <a:blip xmlns:r="http://schemas.openxmlformats.org/officeDocument/2006/relationships" xmlns:a="http://schemas.openxmlformats.org/drawingml/2006/main" r:embed="R60f98c0e2bf247cd"/>
+          <a:blip xmlns:r="http://schemas.openxmlformats.org/officeDocument/2006/relationships" xmlns:a="http://schemas.openxmlformats.org/drawingml/2006/main" r:embed="R81a7b75434c841f0"/>
           <a:stretch xmlns:a="http://schemas.openxmlformats.org/drawingml/2006/main"/>
         </p:blipFill>
         <p:spPr>
@@ -1451,7 +1451,7 @@
           <p:nvPr/>
         </p:nvPicPr>
         <p:blipFill rotWithShape="1">
-          <a:blip xmlns:r="http://schemas.openxmlformats.org/officeDocument/2006/relationships" xmlns:a="http://schemas.openxmlformats.org/drawingml/2006/main" r:embed="Re500e71fcda44865">
+          <a:blip xmlns:r="http://schemas.openxmlformats.org/officeDocument/2006/relationships" xmlns:a="http://schemas.openxmlformats.org/drawingml/2006/main" r:embed="R684ef37edd4e4eff">
             <a:alphaModFix amt="28000"/>
           </a:blip>
           <a:stretch xmlns:a="http://schemas.openxmlformats.org/drawingml/2006/main"/>
@@ -1664,7 +1664,7 @@
           <p:nvPr/>
         </p:nvPicPr>
         <p:blipFill rotWithShape="1">
-          <a:blip xmlns:r="http://schemas.openxmlformats.org/officeDocument/2006/relationships" xmlns:a="http://schemas.openxmlformats.org/drawingml/2006/main" r:embed="R5539c48069a046ff">
+          <a:blip xmlns:r="http://schemas.openxmlformats.org/officeDocument/2006/relationships" xmlns:a="http://schemas.openxmlformats.org/drawingml/2006/main" r:embed="Rbf35686b34d143af">
             <a:alphaModFix amt="28000"/>
           </a:blip>
           <a:stretch xmlns:a="http://schemas.openxmlformats.org/drawingml/2006/main"/>
@@ -1899,7 +1899,7 @@
           <p:nvPr/>
         </p:nvPicPr>
         <p:blipFill rotWithShape="1">
-          <a:blip xmlns:r="http://schemas.openxmlformats.org/officeDocument/2006/relationships" xmlns:a="http://schemas.openxmlformats.org/drawingml/2006/main" r:embed="R855e432ad19842de">
+          <a:blip xmlns:r="http://schemas.openxmlformats.org/officeDocument/2006/relationships" xmlns:a="http://schemas.openxmlformats.org/drawingml/2006/main" r:embed="R9d3404316db240d6">
             <a:alphaModFix amt="28000"/>
           </a:blip>
           <a:stretch xmlns:a="http://schemas.openxmlformats.org/drawingml/2006/main"/>
@@ -2176,7 +2176,7 @@
           <p:nvPr/>
         </p:nvPicPr>
         <p:blipFill rotWithShape="1">
-          <a:blip xmlns:r="http://schemas.openxmlformats.org/officeDocument/2006/relationships" xmlns:a="http://schemas.openxmlformats.org/drawingml/2006/main" r:embed="R7149699bba934079">
+          <a:blip xmlns:r="http://schemas.openxmlformats.org/officeDocument/2006/relationships" xmlns:a="http://schemas.openxmlformats.org/drawingml/2006/main" r:embed="Rfa3bcbace9a14a1f">
             <a:alphaModFix amt="28000"/>
           </a:blip>
           <a:stretch xmlns:a="http://schemas.openxmlformats.org/drawingml/2006/main"/>
@@ -2451,7 +2451,7 @@
           <p:nvPr/>
         </p:nvPicPr>
         <p:blipFill rotWithShape="1">
-          <a:blip xmlns:r="http://schemas.openxmlformats.org/officeDocument/2006/relationships" xmlns:a="http://schemas.openxmlformats.org/drawingml/2006/main" r:embed="Rc04bd1dc004a457d">
+          <a:blip xmlns:r="http://schemas.openxmlformats.org/officeDocument/2006/relationships" xmlns:a="http://schemas.openxmlformats.org/drawingml/2006/main" r:embed="R045984c518334c60">
             <a:alphaModFix amt="28000"/>
           </a:blip>
           <a:stretch xmlns:a="http://schemas.openxmlformats.org/drawingml/2006/main"/>
@@ -2875,7 +2875,7 @@
           <p:nvPr/>
         </p:nvPicPr>
         <p:blipFill rotWithShape="1">
-          <a:blip xmlns:r="http://schemas.openxmlformats.org/officeDocument/2006/relationships" xmlns:a="http://schemas.openxmlformats.org/drawingml/2006/main" r:embed="R0dce24be23584f95">
+          <a:blip xmlns:r="http://schemas.openxmlformats.org/officeDocument/2006/relationships" xmlns:a="http://schemas.openxmlformats.org/drawingml/2006/main" r:embed="R2c27ae9280924bc5">
             <a:alphaModFix amt="28000"/>
           </a:blip>
           <a:stretch xmlns:a="http://schemas.openxmlformats.org/drawingml/2006/main"/>
@@ -3016,7 +3016,7 @@
           <p:nvPr/>
         </p:nvPicPr>
         <p:blipFill rotWithShape="1">
-          <a:blip xmlns:r="http://schemas.openxmlformats.org/officeDocument/2006/relationships" xmlns:a="http://schemas.openxmlformats.org/drawingml/2006/main" r:embed="R17bf4e8927734358">
+          <a:blip xmlns:r="http://schemas.openxmlformats.org/officeDocument/2006/relationships" xmlns:a="http://schemas.openxmlformats.org/drawingml/2006/main" r:embed="R481943729f424054">
             <a:alphaModFix amt="28000"/>
           </a:blip>
           <a:stretch xmlns:a="http://schemas.openxmlformats.org/drawingml/2006/main"/>
@@ -3130,7 +3130,7 @@
           <p:nvPr/>
         </p:nvPicPr>
         <p:blipFill rotWithShape="1">
-          <a:blip xmlns:r="http://schemas.openxmlformats.org/officeDocument/2006/relationships" xmlns:a="http://schemas.openxmlformats.org/drawingml/2006/main" r:embed="R861a6a29c4e94386">
+          <a:blip xmlns:r="http://schemas.openxmlformats.org/officeDocument/2006/relationships" xmlns:a="http://schemas.openxmlformats.org/drawingml/2006/main" r:embed="Rcfab6077f8964529">
             <a:alphaModFix amt="28000"/>
           </a:blip>
           <a:stretch xmlns:a="http://schemas.openxmlformats.org/drawingml/2006/main"/>
@@ -3457,7 +3457,7 @@
           <p:nvPr/>
         </p:nvPicPr>
         <p:blipFill rotWithShape="1">
-          <a:blip xmlns:r="http://schemas.openxmlformats.org/officeDocument/2006/relationships" xmlns:a="http://schemas.openxmlformats.org/drawingml/2006/main" r:embed="R8c6601f174844c6d">
+          <a:blip xmlns:r="http://schemas.openxmlformats.org/officeDocument/2006/relationships" xmlns:a="http://schemas.openxmlformats.org/drawingml/2006/main" r:embed="R2ffda3f9306242ff">
             <a:alphaModFix amt="28000"/>
           </a:blip>
           <a:stretch xmlns:a="http://schemas.openxmlformats.org/drawingml/2006/main"/>
@@ -3745,7 +3745,7 @@
           <p:nvPr/>
         </p:nvPicPr>
         <p:blipFill rotWithShape="1">
-          <a:blip xmlns:r="http://schemas.openxmlformats.org/officeDocument/2006/relationships" xmlns:a="http://schemas.openxmlformats.org/drawingml/2006/main" r:embed="R3819194a77ab41d8">
+          <a:blip xmlns:r="http://schemas.openxmlformats.org/officeDocument/2006/relationships" xmlns:a="http://schemas.openxmlformats.org/drawingml/2006/main" r:embed="R1af19f6230f6447d">
             <a:alphaModFix amt="28000"/>
           </a:blip>
           <a:stretch xmlns:a="http://schemas.openxmlformats.org/drawingml/2006/main"/>
@@ -3982,17 +3982,17 @@
   </p:cSld>
   <p:clrMap bg1="lt1" tx1="dk1" bg2="lt2" tx2="dk2" accent1="accent1" accent2="accent2" accent3="accent3" accent4="accent4" accent5="accent5" accent6="accent6" hlink="hlink" folHlink="folHlink"/>
   <p:sldLayoutIdLst>
-    <p:sldLayoutId xmlns:r="http://schemas.openxmlformats.org/officeDocument/2006/relationships" id="2147483649" r:id="Re7ebf9b6c04e4ac7"/>
-    <p:sldLayoutId xmlns:r="http://schemas.openxmlformats.org/officeDocument/2006/relationships" id="2147483650" r:id="R499efa219cd64193"/>
-    <p:sldLayoutId xmlns:r="http://schemas.openxmlformats.org/officeDocument/2006/relationships" id="2147483651" r:id="R6d25dfa37ebc4006"/>
-    <p:sldLayoutId xmlns:r="http://schemas.openxmlformats.org/officeDocument/2006/relationships" id="2147483652" r:id="R2373baa1272e450d"/>
-    <p:sldLayoutId xmlns:r="http://schemas.openxmlformats.org/officeDocument/2006/relationships" id="2147483653" r:id="R8134b2dc93654162"/>
-    <p:sldLayoutId xmlns:r="http://schemas.openxmlformats.org/officeDocument/2006/relationships" id="2147483654" r:id="R18cf068ae8ec4794"/>
-    <p:sldLayoutId xmlns:r="http://schemas.openxmlformats.org/officeDocument/2006/relationships" id="2147483655" r:id="R79387341364d406d"/>
-    <p:sldLayoutId xmlns:r="http://schemas.openxmlformats.org/officeDocument/2006/relationships" id="2147483656" r:id="R4365016c3df64d0b"/>
-    <p:sldLayoutId xmlns:r="http://schemas.openxmlformats.org/officeDocument/2006/relationships" id="2147483657" r:id="Rb490bf11b6fe44af"/>
-    <p:sldLayoutId xmlns:r="http://schemas.openxmlformats.org/officeDocument/2006/relationships" id="2147483658" r:id="Rbd85f784317e408f"/>
-    <p:sldLayoutId xmlns:r="http://schemas.openxmlformats.org/officeDocument/2006/relationships" id="2147483659" r:id="R3da4c2e9e54a41d0"/>
+    <p:sldLayoutId xmlns:r="http://schemas.openxmlformats.org/officeDocument/2006/relationships" id="2147483649" r:id="Rdc65254919594325"/>
+    <p:sldLayoutId xmlns:r="http://schemas.openxmlformats.org/officeDocument/2006/relationships" id="2147483650" r:id="R380d6f323e3d4d04"/>
+    <p:sldLayoutId xmlns:r="http://schemas.openxmlformats.org/officeDocument/2006/relationships" id="2147483651" r:id="Red41022a6ef045eb"/>
+    <p:sldLayoutId xmlns:r="http://schemas.openxmlformats.org/officeDocument/2006/relationships" id="2147483652" r:id="R2055eaee1d9746f1"/>
+    <p:sldLayoutId xmlns:r="http://schemas.openxmlformats.org/officeDocument/2006/relationships" id="2147483653" r:id="R7d1893ed096f429d"/>
+    <p:sldLayoutId xmlns:r="http://schemas.openxmlformats.org/officeDocument/2006/relationships" id="2147483654" r:id="Rb1f4db5bc69246a1"/>
+    <p:sldLayoutId xmlns:r="http://schemas.openxmlformats.org/officeDocument/2006/relationships" id="2147483655" r:id="Rca7e689210384479"/>
+    <p:sldLayoutId xmlns:r="http://schemas.openxmlformats.org/officeDocument/2006/relationships" id="2147483656" r:id="R2b2a902799bf4fbe"/>
+    <p:sldLayoutId xmlns:r="http://schemas.openxmlformats.org/officeDocument/2006/relationships" id="2147483657" r:id="R7d62547d56334a4a"/>
+    <p:sldLayoutId xmlns:r="http://schemas.openxmlformats.org/officeDocument/2006/relationships" id="2147483658" r:id="R5acbde1d36334675"/>
+    <p:sldLayoutId xmlns:r="http://schemas.openxmlformats.org/officeDocument/2006/relationships" id="2147483659" r:id="R18a66f97a97e4998"/>
   </p:sldLayoutIdLst>
   <p:hf hdr="0" ftr="0" dt="0"/>
   <p:txStyles>

--- a/Mapped Curriculum Lessons/Grade 8/Lesson 32 - Functions/Functions - Slides.pptx
+++ b/Mapped Curriculum Lessons/Grade 8/Lesson 32 - Functions/Functions - Slides.pptx
@@ -2,28 +2,28 @@
 <file path=ppt/presentation.xml><?xml version="1.0" encoding="utf-8"?>
 <p:presentation xmlns:p="http://schemas.openxmlformats.org/presentationml/2006/main" embedTrueTypeFonts="1" saveSubsetFonts="0">
   <p:sldMasterIdLst>
-    <p:sldMasterId xmlns:r="http://schemas.openxmlformats.org/officeDocument/2006/relationships" id="2147483648" r:id="R2c4e09d8e6424701"/>
+    <p:sldMasterId xmlns:r="http://schemas.openxmlformats.org/officeDocument/2006/relationships" id="2147483648" r:id="R1a043dff898147f3"/>
   </p:sldMasterIdLst>
   <p:notesMasterIdLst>
-    <p:notesMasterId xmlns:r="http://schemas.openxmlformats.org/officeDocument/2006/relationships" r:id="R7fbacad089cd4494"/>
+    <p:notesMasterId xmlns:r="http://schemas.openxmlformats.org/officeDocument/2006/relationships" r:id="R541b3b55e5f544d7"/>
   </p:notesMasterIdLst>
   <p:sldIdLst>
-    <p:sldId xmlns:r="http://schemas.openxmlformats.org/officeDocument/2006/relationships" id="256" r:id="R20377c7fe96240fb"/>
-    <p:sldId xmlns:r="http://schemas.openxmlformats.org/officeDocument/2006/relationships" id="257" r:id="R7ebc6da01ae947df"/>
-    <p:sldId xmlns:r="http://schemas.openxmlformats.org/officeDocument/2006/relationships" id="258" r:id="Rf9553ac868384e23"/>
-    <p:sldId xmlns:r="http://schemas.openxmlformats.org/officeDocument/2006/relationships" id="259" r:id="R67650ac5150a47f7"/>
-    <p:sldId xmlns:r="http://schemas.openxmlformats.org/officeDocument/2006/relationships" id="260" r:id="Re603b22737224b0c"/>
-    <p:sldId xmlns:r="http://schemas.openxmlformats.org/officeDocument/2006/relationships" id="261" r:id="Rcff28c23c61849c8"/>
-    <p:sldId xmlns:r="http://schemas.openxmlformats.org/officeDocument/2006/relationships" id="262" r:id="Rcb47162ad04b4285"/>
-    <p:sldId xmlns:r="http://schemas.openxmlformats.org/officeDocument/2006/relationships" id="263" r:id="Rdff3ba6568594693"/>
-    <p:sldId xmlns:r="http://schemas.openxmlformats.org/officeDocument/2006/relationships" id="264" r:id="R0489eb554b0b440a"/>
+    <p:sldId xmlns:r="http://schemas.openxmlformats.org/officeDocument/2006/relationships" id="256" r:id="Rb6f41731bd9a46d4"/>
+    <p:sldId xmlns:r="http://schemas.openxmlformats.org/officeDocument/2006/relationships" id="257" r:id="R6f7fd9bab25e4422"/>
+    <p:sldId xmlns:r="http://schemas.openxmlformats.org/officeDocument/2006/relationships" id="258" r:id="R367e7e4ccc944258"/>
+    <p:sldId xmlns:r="http://schemas.openxmlformats.org/officeDocument/2006/relationships" id="259" r:id="R24fb5521f105439e"/>
+    <p:sldId xmlns:r="http://schemas.openxmlformats.org/officeDocument/2006/relationships" id="260" r:id="Rb823f92515ac470f"/>
+    <p:sldId xmlns:r="http://schemas.openxmlformats.org/officeDocument/2006/relationships" id="261" r:id="Rdc2e9a46698d44d4"/>
+    <p:sldId xmlns:r="http://schemas.openxmlformats.org/officeDocument/2006/relationships" id="262" r:id="Ra5f419b91a0f4316"/>
+    <p:sldId xmlns:r="http://schemas.openxmlformats.org/officeDocument/2006/relationships" id="263" r:id="R608bcf04caad4253"/>
+    <p:sldId xmlns:r="http://schemas.openxmlformats.org/officeDocument/2006/relationships" id="264" r:id="Rc6adfbe915264407"/>
   </p:sldIdLst>
   <p:sldSz cx="12192000" cy="6858000"/>
   <p:notesSz cx="6858000" cy="9144000"/>
   <p:embeddedFontLst>
     <p:embeddedFont>
       <p:font typeface="JetBrains Mono"/>
-      <p:regular xmlns:r="http://schemas.openxmlformats.org/officeDocument/2006/relationships" r:id="R57b10bf0e6d844e7"/>
+      <p:regular xmlns:r="http://schemas.openxmlformats.org/officeDocument/2006/relationships" r:id="R576e6626a6fc43b1"/>
     </p:embeddedFont>
   </p:embeddedFontLst>
 </p:presentation>
@@ -1071,7 +1071,7 @@
           <p:nvPr/>
         </p:nvPicPr>
         <p:blipFill rotWithShape="1">
-          <a:blip xmlns:r="http://schemas.openxmlformats.org/officeDocument/2006/relationships" xmlns:a="http://schemas.openxmlformats.org/drawingml/2006/main" r:embed="R81a7b75434c841f0"/>
+          <a:blip xmlns:r="http://schemas.openxmlformats.org/officeDocument/2006/relationships" xmlns:a="http://schemas.openxmlformats.org/drawingml/2006/main" r:embed="Rf50384c1644a4ec0"/>
           <a:stretch xmlns:a="http://schemas.openxmlformats.org/drawingml/2006/main"/>
         </p:blipFill>
         <p:spPr>
@@ -1451,7 +1451,7 @@
           <p:nvPr/>
         </p:nvPicPr>
         <p:blipFill rotWithShape="1">
-          <a:blip xmlns:r="http://schemas.openxmlformats.org/officeDocument/2006/relationships" xmlns:a="http://schemas.openxmlformats.org/drawingml/2006/main" r:embed="R684ef37edd4e4eff">
+          <a:blip xmlns:r="http://schemas.openxmlformats.org/officeDocument/2006/relationships" xmlns:a="http://schemas.openxmlformats.org/drawingml/2006/main" r:embed="R0b79b26c12594a0c">
             <a:alphaModFix amt="28000"/>
           </a:blip>
           <a:stretch xmlns:a="http://schemas.openxmlformats.org/drawingml/2006/main"/>
@@ -1664,7 +1664,7 @@
           <p:nvPr/>
         </p:nvPicPr>
         <p:blipFill rotWithShape="1">
-          <a:blip xmlns:r="http://schemas.openxmlformats.org/officeDocument/2006/relationships" xmlns:a="http://schemas.openxmlformats.org/drawingml/2006/main" r:embed="Rbf35686b34d143af">
+          <a:blip xmlns:r="http://schemas.openxmlformats.org/officeDocument/2006/relationships" xmlns:a="http://schemas.openxmlformats.org/drawingml/2006/main" r:embed="R63babb2df45f43a4">
             <a:alphaModFix amt="28000"/>
           </a:blip>
           <a:stretch xmlns:a="http://schemas.openxmlformats.org/drawingml/2006/main"/>
@@ -1899,7 +1899,7 @@
           <p:nvPr/>
         </p:nvPicPr>
         <p:blipFill rotWithShape="1">
-          <a:blip xmlns:r="http://schemas.openxmlformats.org/officeDocument/2006/relationships" xmlns:a="http://schemas.openxmlformats.org/drawingml/2006/main" r:embed="R9d3404316db240d6">
+          <a:blip xmlns:r="http://schemas.openxmlformats.org/officeDocument/2006/relationships" xmlns:a="http://schemas.openxmlformats.org/drawingml/2006/main" r:embed="R3ab0a7786493413a">
             <a:alphaModFix amt="28000"/>
           </a:blip>
           <a:stretch xmlns:a="http://schemas.openxmlformats.org/drawingml/2006/main"/>
@@ -2176,7 +2176,7 @@
           <p:nvPr/>
         </p:nvPicPr>
         <p:blipFill rotWithShape="1">
-          <a:blip xmlns:r="http://schemas.openxmlformats.org/officeDocument/2006/relationships" xmlns:a="http://schemas.openxmlformats.org/drawingml/2006/main" r:embed="Rfa3bcbace9a14a1f">
+          <a:blip xmlns:r="http://schemas.openxmlformats.org/officeDocument/2006/relationships" xmlns:a="http://schemas.openxmlformats.org/drawingml/2006/main" r:embed="R9be74861e5934bea">
             <a:alphaModFix amt="28000"/>
           </a:blip>
           <a:stretch xmlns:a="http://schemas.openxmlformats.org/drawingml/2006/main"/>
@@ -2451,7 +2451,7 @@
           <p:nvPr/>
         </p:nvPicPr>
         <p:blipFill rotWithShape="1">
-          <a:blip xmlns:r="http://schemas.openxmlformats.org/officeDocument/2006/relationships" xmlns:a="http://schemas.openxmlformats.org/drawingml/2006/main" r:embed="R045984c518334c60">
+          <a:blip xmlns:r="http://schemas.openxmlformats.org/officeDocument/2006/relationships" xmlns:a="http://schemas.openxmlformats.org/drawingml/2006/main" r:embed="R11dd7d78420543c2">
             <a:alphaModFix amt="28000"/>
           </a:blip>
           <a:stretch xmlns:a="http://schemas.openxmlformats.org/drawingml/2006/main"/>
@@ -2875,7 +2875,7 @@
           <p:nvPr/>
         </p:nvPicPr>
         <p:blipFill rotWithShape="1">
-          <a:blip xmlns:r="http://schemas.openxmlformats.org/officeDocument/2006/relationships" xmlns:a="http://schemas.openxmlformats.org/drawingml/2006/main" r:embed="R2c27ae9280924bc5">
+          <a:blip xmlns:r="http://schemas.openxmlformats.org/officeDocument/2006/relationships" xmlns:a="http://schemas.openxmlformats.org/drawingml/2006/main" r:embed="Rfd8d248c255e4875">
             <a:alphaModFix amt="28000"/>
           </a:blip>
           <a:stretch xmlns:a="http://schemas.openxmlformats.org/drawingml/2006/main"/>
@@ -3016,7 +3016,7 @@
           <p:nvPr/>
         </p:nvPicPr>
         <p:blipFill rotWithShape="1">
-          <a:blip xmlns:r="http://schemas.openxmlformats.org/officeDocument/2006/relationships" xmlns:a="http://schemas.openxmlformats.org/drawingml/2006/main" r:embed="R481943729f424054">
+          <a:blip xmlns:r="http://schemas.openxmlformats.org/officeDocument/2006/relationships" xmlns:a="http://schemas.openxmlformats.org/drawingml/2006/main" r:embed="Rf8ec0968dc64420f">
             <a:alphaModFix amt="28000"/>
           </a:blip>
           <a:stretch xmlns:a="http://schemas.openxmlformats.org/drawingml/2006/main"/>
@@ -3130,7 +3130,7 @@
           <p:nvPr/>
         </p:nvPicPr>
         <p:blipFill rotWithShape="1">
-          <a:blip xmlns:r="http://schemas.openxmlformats.org/officeDocument/2006/relationships" xmlns:a="http://schemas.openxmlformats.org/drawingml/2006/main" r:embed="Rcfab6077f8964529">
+          <a:blip xmlns:r="http://schemas.openxmlformats.org/officeDocument/2006/relationships" xmlns:a="http://schemas.openxmlformats.org/drawingml/2006/main" r:embed="Rb8a0cd37c9744832">
             <a:alphaModFix amt="28000"/>
           </a:blip>
           <a:stretch xmlns:a="http://schemas.openxmlformats.org/drawingml/2006/main"/>
@@ -3457,7 +3457,7 @@
           <p:nvPr/>
         </p:nvPicPr>
         <p:blipFill rotWithShape="1">
-          <a:blip xmlns:r="http://schemas.openxmlformats.org/officeDocument/2006/relationships" xmlns:a="http://schemas.openxmlformats.org/drawingml/2006/main" r:embed="R2ffda3f9306242ff">
+          <a:blip xmlns:r="http://schemas.openxmlformats.org/officeDocument/2006/relationships" xmlns:a="http://schemas.openxmlformats.org/drawingml/2006/main" r:embed="R4c4cc1447a9340b2">
             <a:alphaModFix amt="28000"/>
           </a:blip>
           <a:stretch xmlns:a="http://schemas.openxmlformats.org/drawingml/2006/main"/>
@@ -3745,7 +3745,7 @@
           <p:nvPr/>
         </p:nvPicPr>
         <p:blipFill rotWithShape="1">
-          <a:blip xmlns:r="http://schemas.openxmlformats.org/officeDocument/2006/relationships" xmlns:a="http://schemas.openxmlformats.org/drawingml/2006/main" r:embed="R1af19f6230f6447d">
+          <a:blip xmlns:r="http://schemas.openxmlformats.org/officeDocument/2006/relationships" xmlns:a="http://schemas.openxmlformats.org/drawingml/2006/main" r:embed="R3d85b7593bba4ac9">
             <a:alphaModFix amt="28000"/>
           </a:blip>
           <a:stretch xmlns:a="http://schemas.openxmlformats.org/drawingml/2006/main"/>
@@ -3982,17 +3982,17 @@
   </p:cSld>
   <p:clrMap bg1="lt1" tx1="dk1" bg2="lt2" tx2="dk2" accent1="accent1" accent2="accent2" accent3="accent3" accent4="accent4" accent5="accent5" accent6="accent6" hlink="hlink" folHlink="folHlink"/>
   <p:sldLayoutIdLst>
-    <p:sldLayoutId xmlns:r="http://schemas.openxmlformats.org/officeDocument/2006/relationships" id="2147483649" r:id="Rdc65254919594325"/>
-    <p:sldLayoutId xmlns:r="http://schemas.openxmlformats.org/officeDocument/2006/relationships" id="2147483650" r:id="R380d6f323e3d4d04"/>
-    <p:sldLayoutId xmlns:r="http://schemas.openxmlformats.org/officeDocument/2006/relationships" id="2147483651" r:id="Red41022a6ef045eb"/>
-    <p:sldLayoutId xmlns:r="http://schemas.openxmlformats.org/officeDocument/2006/relationships" id="2147483652" r:id="R2055eaee1d9746f1"/>
-    <p:sldLayoutId xmlns:r="http://schemas.openxmlformats.org/officeDocument/2006/relationships" id="2147483653" r:id="R7d1893ed096f429d"/>
-    <p:sldLayoutId xmlns:r="http://schemas.openxmlformats.org/officeDocument/2006/relationships" id="2147483654" r:id="Rb1f4db5bc69246a1"/>
-    <p:sldLayoutId xmlns:r="http://schemas.openxmlformats.org/officeDocument/2006/relationships" id="2147483655" r:id="Rca7e689210384479"/>
-    <p:sldLayoutId xmlns:r="http://schemas.openxmlformats.org/officeDocument/2006/relationships" id="2147483656" r:id="R2b2a902799bf4fbe"/>
-    <p:sldLayoutId xmlns:r="http://schemas.openxmlformats.org/officeDocument/2006/relationships" id="2147483657" r:id="R7d62547d56334a4a"/>
-    <p:sldLayoutId xmlns:r="http://schemas.openxmlformats.org/officeDocument/2006/relationships" id="2147483658" r:id="R5acbde1d36334675"/>
-    <p:sldLayoutId xmlns:r="http://schemas.openxmlformats.org/officeDocument/2006/relationships" id="2147483659" r:id="R18a66f97a97e4998"/>
+    <p:sldLayoutId xmlns:r="http://schemas.openxmlformats.org/officeDocument/2006/relationships" id="2147483649" r:id="R9b26f5bf2b4f4bc6"/>
+    <p:sldLayoutId xmlns:r="http://schemas.openxmlformats.org/officeDocument/2006/relationships" id="2147483650" r:id="R3f0e4154621f4090"/>
+    <p:sldLayoutId xmlns:r="http://schemas.openxmlformats.org/officeDocument/2006/relationships" id="2147483651" r:id="Rf8c6b47d2ce24854"/>
+    <p:sldLayoutId xmlns:r="http://schemas.openxmlformats.org/officeDocument/2006/relationships" id="2147483652" r:id="Rbaaf4d9df8b846a2"/>
+    <p:sldLayoutId xmlns:r="http://schemas.openxmlformats.org/officeDocument/2006/relationships" id="2147483653" r:id="R912483d2437d4132"/>
+    <p:sldLayoutId xmlns:r="http://schemas.openxmlformats.org/officeDocument/2006/relationships" id="2147483654" r:id="R210f902bbba54c53"/>
+    <p:sldLayoutId xmlns:r="http://schemas.openxmlformats.org/officeDocument/2006/relationships" id="2147483655" r:id="R937a14b8e0464612"/>
+    <p:sldLayoutId xmlns:r="http://schemas.openxmlformats.org/officeDocument/2006/relationships" id="2147483656" r:id="Ra2a45e6185514290"/>
+    <p:sldLayoutId xmlns:r="http://schemas.openxmlformats.org/officeDocument/2006/relationships" id="2147483657" r:id="Rea3c354156a04c1e"/>
+    <p:sldLayoutId xmlns:r="http://schemas.openxmlformats.org/officeDocument/2006/relationships" id="2147483658" r:id="Rd267c1ee158846e7"/>
+    <p:sldLayoutId xmlns:r="http://schemas.openxmlformats.org/officeDocument/2006/relationships" id="2147483659" r:id="R2c6cc5ed5e9740f5"/>
   </p:sldLayoutIdLst>
   <p:hf hdr="0" ftr="0" dt="0"/>
   <p:txStyles>
@@ -6733,10 +6733,10 @@
                 <a:ea typeface="Calibri"/>
                 <a:cs typeface="Calibri"/>
               </a:rPr>
-              <a:t>Rename </a:t>
-            </a:r>
-            <a:r>
-              <a:rPr sz="2400" b="0">
+              <a:t>Change the example by adding a second function called </a:t>
+            </a:r>
+            <a:r>
+              <a:rPr sz="2050" b="0">
                 <a:solidFill>
                   <a:srgbClr val="1750EB"/>
                 </a:solidFill>
@@ -6744,7 +6744,7 @@
                 <a:ea typeface="JetBrains Mono"/>
                 <a:cs typeface="JetBrains Mono"/>
               </a:rPr>
-              <a:t>show_greeting()</a:t>
+              <a:t>show_rules()</a:t>
             </a:r>
             <a:r>
               <a:rPr sz="2400" b="0">
@@ -6755,18 +6755,18 @@
                 <a:ea typeface="Calibri"/>
                 <a:cs typeface="Calibri"/>
               </a:rPr>
-              <a:t> to </a:t>
-            </a:r>
-            <a:r>
-              <a:rPr sz="2400" b="0">
-                <a:solidFill>
-                  <a:srgbClr val="1750EB"/>
-                </a:solidFill>
-                <a:latin typeface="JetBrains Mono"/>
-                <a:ea typeface="JetBrains Mono"/>
-                <a:cs typeface="JetBrains Mono"/>
-              </a:rPr>
-              <a:t>show_welcome()</a:t>
+              <a:t> that displays </a:t>
+            </a:r>
+            <a:r>
+              <a:rPr sz="2050" b="0">
+                <a:solidFill>
+                  <a:srgbClr val="067D17"/>
+                </a:solidFill>
+                <a:latin typeface="JetBrains Mono"/>
+                <a:ea typeface="JetBrains Mono"/>
+                <a:cs typeface="JetBrains Mono"/>
+              </a:rPr>
+              <a:t>"Save your work often."</a:t>
             </a:r>
             <a:r>
               <a:rPr sz="2400" b="0">
@@ -6777,7 +6777,73 @@
                 <a:ea typeface="Calibri"/>
                 <a:cs typeface="Calibri"/>
               </a:rPr>
-              <a:t> and update the function call. The two original messages must still appear in the same order.</a:t>
+              <a:t> and </a:t>
+            </a:r>
+            <a:r>
+              <a:rPr sz="2050" b="0">
+                <a:solidFill>
+                  <a:srgbClr val="067D17"/>
+                </a:solidFill>
+                <a:latin typeface="JetBrains Mono"/>
+                <a:ea typeface="JetBrains Mono"/>
+                <a:cs typeface="JetBrains Mono"/>
+              </a:rPr>
+              <a:t>"Ask for help when stuck."</a:t>
+            </a:r>
+            <a:r>
+              <a:rPr sz="2400" b="0">
+                <a:solidFill>
+                  <a:srgbClr val="080808"/>
+                </a:solidFill>
+                <a:latin typeface="Calibri"/>
+                <a:ea typeface="Calibri"/>
+                <a:cs typeface="Calibri"/>
+              </a:rPr>
+              <a:t> Call </a:t>
+            </a:r>
+            <a:r>
+              <a:rPr sz="2050" b="0">
+                <a:solidFill>
+                  <a:srgbClr val="1750EB"/>
+                </a:solidFill>
+                <a:latin typeface="JetBrains Mono"/>
+                <a:ea typeface="JetBrains Mono"/>
+                <a:cs typeface="JetBrains Mono"/>
+              </a:rPr>
+              <a:t>show_rules()</a:t>
+            </a:r>
+            <a:r>
+              <a:rPr sz="2400" b="0">
+                <a:solidFill>
+                  <a:srgbClr val="080808"/>
+                </a:solidFill>
+                <a:latin typeface="Calibri"/>
+                <a:ea typeface="Calibri"/>
+                <a:cs typeface="Calibri"/>
+              </a:rPr>
+              <a:t> after </a:t>
+            </a:r>
+            <a:r>
+              <a:rPr sz="2050" b="0">
+                <a:solidFill>
+                  <a:srgbClr val="1750EB"/>
+                </a:solidFill>
+                <a:latin typeface="JetBrains Mono"/>
+                <a:ea typeface="JetBrains Mono"/>
+                <a:cs typeface="JetBrains Mono"/>
+              </a:rPr>
+              <a:t>show_greeting()</a:t>
+            </a:r>
+            <a:r>
+              <a:rPr sz="2400" b="0">
+                <a:solidFill>
+                  <a:srgbClr val="080808"/>
+                </a:solidFill>
+                <a:latin typeface="Calibri"/>
+                <a:ea typeface="Calibri"/>
+                <a:cs typeface="Calibri"/>
+              </a:rPr>
+              <a:t> and before the final message.</a:t>
             </a:r>
           </a:p>
         </p:txBody>
@@ -7314,10 +7380,10 @@
                 <a:ea typeface="Calibri"/>
                 <a:cs typeface="Calibri"/>
               </a:rPr>
-              <a:t>A greeting is useful more than once. Call </a:t>
-            </a:r>
-            <a:r>
-              <a:rPr sz="2400" b="0">
+              <a:t>Extend the example with a function called </a:t>
+            </a:r>
+            <a:r>
+              <a:rPr sz="2050" b="0">
                 <a:solidFill>
                   <a:srgbClr val="1750EB"/>
                 </a:solidFill>
@@ -7325,7 +7391,7 @@
                 <a:ea typeface="JetBrains Mono"/>
                 <a:cs typeface="JetBrains Mono"/>
               </a:rPr>
-              <a:t>show_greeting()</a:t>
+              <a:t>show_line()</a:t>
             </a:r>
             <a:r>
               <a:rPr sz="2400" b="0">
@@ -7336,18 +7402,18 @@
                 <a:ea typeface="Calibri"/>
                 <a:cs typeface="Calibri"/>
               </a:rPr>
-              <a:t> a second time so </a:t>
-            </a:r>
-            <a:r>
-              <a:rPr sz="2400" b="0">
-                <a:solidFill>
-                  <a:srgbClr val="067D17"/>
-                </a:solidFill>
-                <a:latin typeface="JetBrains Mono"/>
-                <a:ea typeface="JetBrains Mono"/>
-                <a:cs typeface="JetBrains Mono"/>
-              </a:rPr>
-              <a:t>"Hello, Python learner!"</a:t>
+              <a:t> that displays a line of dashes. Call </a:t>
+            </a:r>
+            <a:r>
+              <a:rPr sz="2050" b="0">
+                <a:solidFill>
+                  <a:srgbClr val="1750EB"/>
+                </a:solidFill>
+                <a:latin typeface="JetBrains Mono"/>
+                <a:ea typeface="JetBrains Mono"/>
+                <a:cs typeface="JetBrains Mono"/>
+              </a:rPr>
+              <a:t>show_line()</a:t>
             </a:r>
             <a:r>
               <a:rPr sz="2400" b="0">
@@ -7358,18 +7424,18 @@
                 <a:ea typeface="Calibri"/>
                 <a:cs typeface="Calibri"/>
               </a:rPr>
-              <a:t> appears twice. Keep the final </a:t>
-            </a:r>
-            <a:r>
-              <a:rPr sz="2400" b="0">
-                <a:solidFill>
-                  <a:srgbClr val="067D17"/>
-                </a:solidFill>
-                <a:latin typeface="JetBrains Mono"/>
-                <a:ea typeface="JetBrains Mono"/>
-                <a:cs typeface="JetBrains Mono"/>
-              </a:rPr>
-              <a:t>"Welcome to Python."</a:t>
+              <a:t> before and after </a:t>
+            </a:r>
+            <a:r>
+              <a:rPr sz="2050" b="0">
+                <a:solidFill>
+                  <a:srgbClr val="1750EB"/>
+                </a:solidFill>
+                <a:latin typeface="JetBrains Mono"/>
+                <a:ea typeface="JetBrains Mono"/>
+                <a:cs typeface="JetBrains Mono"/>
+              </a:rPr>
+              <a:t>show_greeting()</a:t>
             </a:r>
             <a:r>
               <a:rPr sz="2400" b="0">
@@ -7380,7 +7446,7 @@
                 <a:ea typeface="Calibri"/>
                 <a:cs typeface="Calibri"/>
               </a:rPr>
-              <a:t> message. Predict the number of greetings before you run the program.</a:t>
+              <a:t> so the greeting appears inside a banner.</a:t>
             </a:r>
           </a:p>
         </p:txBody>
@@ -7917,10 +7983,10 @@
                 <a:ea typeface="Calibri"/>
                 <a:cs typeface="Calibri"/>
               </a:rPr>
-              <a:t>Build one no-input function called </a:t>
-            </a:r>
-            <a:r>
-              <a:rPr sz="2400" b="0">
+              <a:t>Create a program with two functions: </a:t>
+            </a:r>
+            <a:r>
+              <a:rPr sz="2050" b="0">
                 <a:solidFill>
                   <a:srgbClr val="1750EB"/>
                 </a:solidFill>
@@ -7928,7 +7994,7 @@
                 <a:ea typeface="JetBrains Mono"/>
                 <a:cs typeface="JetBrains Mono"/>
               </a:rPr>
-              <a:t>show_tip()</a:t>
+              <a:t>show_intro()</a:t>
             </a:r>
             <a:r>
               <a:rPr sz="2400" b="0">
@@ -7939,7 +8005,95 @@
                 <a:ea typeface="Calibri"/>
                 <a:cs typeface="Calibri"/>
               </a:rPr>
-              <a:t> that displays a Python tip of your choice. Call it twice; the same tip should appear two times.</a:t>
+              <a:t> displays a welcome message and </a:t>
+            </a:r>
+            <a:r>
+              <a:rPr sz="2050" b="0">
+                <a:solidFill>
+                  <a:srgbClr val="1750EB"/>
+                </a:solidFill>
+                <a:latin typeface="JetBrains Mono"/>
+                <a:ea typeface="JetBrains Mono"/>
+                <a:cs typeface="JetBrains Mono"/>
+              </a:rPr>
+              <a:t>show_goodbye()</a:t>
+            </a:r>
+            <a:r>
+              <a:rPr sz="2400" b="0">
+                <a:solidFill>
+                  <a:srgbClr val="080808"/>
+                </a:solidFill>
+                <a:latin typeface="Calibri"/>
+                <a:ea typeface="Calibri"/>
+                <a:cs typeface="Calibri"/>
+              </a:rPr>
+              <a:t> displays a farewell. In the main program, call </a:t>
+            </a:r>
+            <a:r>
+              <a:rPr sz="2050" b="0">
+                <a:solidFill>
+                  <a:srgbClr val="1750EB"/>
+                </a:solidFill>
+                <a:latin typeface="JetBrains Mono"/>
+                <a:ea typeface="JetBrains Mono"/>
+                <a:cs typeface="JetBrains Mono"/>
+              </a:rPr>
+              <a:t>show_intro()</a:t>
+            </a:r>
+            <a:r>
+              <a:rPr sz="2400" b="0">
+                <a:solidFill>
+                  <a:srgbClr val="080808"/>
+                </a:solidFill>
+                <a:latin typeface="Calibri"/>
+                <a:ea typeface="Calibri"/>
+                <a:cs typeface="Calibri"/>
+              </a:rPr>
+              <a:t>, ask for the user's name, display </a:t>
+            </a:r>
+            <a:r>
+              <a:rPr sz="2050" b="0">
+                <a:solidFill>
+                  <a:srgbClr val="067D17"/>
+                </a:solidFill>
+                <a:latin typeface="JetBrains Mono"/>
+                <a:ea typeface="JetBrains Mono"/>
+                <a:cs typeface="JetBrains Mono"/>
+              </a:rPr>
+              <a:t>"Nice to meet you,"</a:t>
+            </a:r>
+            <a:r>
+              <a:rPr sz="2400" b="0">
+                <a:solidFill>
+                  <a:srgbClr val="080808"/>
+                </a:solidFill>
+                <a:latin typeface="Calibri"/>
+                <a:ea typeface="Calibri"/>
+                <a:cs typeface="Calibri"/>
+              </a:rPr>
+              <a:t> followed by the name, then call </a:t>
+            </a:r>
+            <a:r>
+              <a:rPr sz="2050" b="0">
+                <a:solidFill>
+                  <a:srgbClr val="1750EB"/>
+                </a:solidFill>
+                <a:latin typeface="JetBrains Mono"/>
+                <a:ea typeface="JetBrains Mono"/>
+                <a:cs typeface="JetBrains Mono"/>
+              </a:rPr>
+              <a:t>show_goodbye()</a:t>
+            </a:r>
+            <a:r>
+              <a:rPr sz="2400" b="0">
+                <a:solidFill>
+                  <a:srgbClr val="080808"/>
+                </a:solidFill>
+                <a:latin typeface="Calibri"/>
+                <a:ea typeface="Calibri"/>
+                <a:cs typeface="Calibri"/>
+              </a:rPr>
+              <a:t>.</a:t>
             </a:r>
           </a:p>
         </p:txBody>

--- a/Mapped Curriculum Lessons/Grade 8/Lesson 32 - Functions/Functions - Slides.pptx
+++ b/Mapped Curriculum Lessons/Grade 8/Lesson 32 - Functions/Functions - Slides.pptx
@@ -2,28 +2,28 @@
 <file path=ppt/presentation.xml><?xml version="1.0" encoding="utf-8"?>
 <p:presentation xmlns:p="http://schemas.openxmlformats.org/presentationml/2006/main" embedTrueTypeFonts="1" saveSubsetFonts="0">
   <p:sldMasterIdLst>
-    <p:sldMasterId xmlns:r="http://schemas.openxmlformats.org/officeDocument/2006/relationships" id="2147483648" r:id="R1a043dff898147f3"/>
+    <p:sldMasterId xmlns:r="http://schemas.openxmlformats.org/officeDocument/2006/relationships" id="2147483648" r:id="R75a358977962464a"/>
   </p:sldMasterIdLst>
   <p:notesMasterIdLst>
-    <p:notesMasterId xmlns:r="http://schemas.openxmlformats.org/officeDocument/2006/relationships" r:id="R541b3b55e5f544d7"/>
+    <p:notesMasterId xmlns:r="http://schemas.openxmlformats.org/officeDocument/2006/relationships" r:id="Rc6c499530b34440f"/>
   </p:notesMasterIdLst>
   <p:sldIdLst>
-    <p:sldId xmlns:r="http://schemas.openxmlformats.org/officeDocument/2006/relationships" id="256" r:id="Rb6f41731bd9a46d4"/>
-    <p:sldId xmlns:r="http://schemas.openxmlformats.org/officeDocument/2006/relationships" id="257" r:id="R6f7fd9bab25e4422"/>
-    <p:sldId xmlns:r="http://schemas.openxmlformats.org/officeDocument/2006/relationships" id="258" r:id="R367e7e4ccc944258"/>
-    <p:sldId xmlns:r="http://schemas.openxmlformats.org/officeDocument/2006/relationships" id="259" r:id="R24fb5521f105439e"/>
-    <p:sldId xmlns:r="http://schemas.openxmlformats.org/officeDocument/2006/relationships" id="260" r:id="Rb823f92515ac470f"/>
-    <p:sldId xmlns:r="http://schemas.openxmlformats.org/officeDocument/2006/relationships" id="261" r:id="Rdc2e9a46698d44d4"/>
-    <p:sldId xmlns:r="http://schemas.openxmlformats.org/officeDocument/2006/relationships" id="262" r:id="Ra5f419b91a0f4316"/>
-    <p:sldId xmlns:r="http://schemas.openxmlformats.org/officeDocument/2006/relationships" id="263" r:id="R608bcf04caad4253"/>
-    <p:sldId xmlns:r="http://schemas.openxmlformats.org/officeDocument/2006/relationships" id="264" r:id="Rc6adfbe915264407"/>
+    <p:sldId xmlns:r="http://schemas.openxmlformats.org/officeDocument/2006/relationships" id="256" r:id="Rfd8a91a3f3314e7f"/>
+    <p:sldId xmlns:r="http://schemas.openxmlformats.org/officeDocument/2006/relationships" id="257" r:id="R6980b8079aaf4617"/>
+    <p:sldId xmlns:r="http://schemas.openxmlformats.org/officeDocument/2006/relationships" id="258" r:id="R3d90df64d8e64e22"/>
+    <p:sldId xmlns:r="http://schemas.openxmlformats.org/officeDocument/2006/relationships" id="259" r:id="R0b4f9210bf824a03"/>
+    <p:sldId xmlns:r="http://schemas.openxmlformats.org/officeDocument/2006/relationships" id="260" r:id="Rbd1b64300f114da4"/>
+    <p:sldId xmlns:r="http://schemas.openxmlformats.org/officeDocument/2006/relationships" id="261" r:id="R040318237bce484a"/>
+    <p:sldId xmlns:r="http://schemas.openxmlformats.org/officeDocument/2006/relationships" id="262" r:id="Rf85765e1276945f9"/>
+    <p:sldId xmlns:r="http://schemas.openxmlformats.org/officeDocument/2006/relationships" id="263" r:id="Rdbddd9f8d3a844ed"/>
+    <p:sldId xmlns:r="http://schemas.openxmlformats.org/officeDocument/2006/relationships" id="264" r:id="R3ba9e8867262403b"/>
   </p:sldIdLst>
   <p:sldSz cx="12192000" cy="6858000"/>
   <p:notesSz cx="6858000" cy="9144000"/>
   <p:embeddedFontLst>
     <p:embeddedFont>
       <p:font typeface="JetBrains Mono"/>
-      <p:regular xmlns:r="http://schemas.openxmlformats.org/officeDocument/2006/relationships" r:id="R576e6626a6fc43b1"/>
+      <p:regular xmlns:r="http://schemas.openxmlformats.org/officeDocument/2006/relationships" r:id="R7b80e7426ff6481e"/>
     </p:embeddedFont>
   </p:embeddedFontLst>
 </p:presentation>
@@ -1071,7 +1071,7 @@
           <p:nvPr/>
         </p:nvPicPr>
         <p:blipFill rotWithShape="1">
-          <a:blip xmlns:r="http://schemas.openxmlformats.org/officeDocument/2006/relationships" xmlns:a="http://schemas.openxmlformats.org/drawingml/2006/main" r:embed="Rf50384c1644a4ec0"/>
+          <a:blip xmlns:r="http://schemas.openxmlformats.org/officeDocument/2006/relationships" xmlns:a="http://schemas.openxmlformats.org/drawingml/2006/main" r:embed="R699985d9b0034a2c"/>
           <a:stretch xmlns:a="http://schemas.openxmlformats.org/drawingml/2006/main"/>
         </p:blipFill>
         <p:spPr>
@@ -1451,7 +1451,7 @@
           <p:nvPr/>
         </p:nvPicPr>
         <p:blipFill rotWithShape="1">
-          <a:blip xmlns:r="http://schemas.openxmlformats.org/officeDocument/2006/relationships" xmlns:a="http://schemas.openxmlformats.org/drawingml/2006/main" r:embed="R0b79b26c12594a0c">
+          <a:blip xmlns:r="http://schemas.openxmlformats.org/officeDocument/2006/relationships" xmlns:a="http://schemas.openxmlformats.org/drawingml/2006/main" r:embed="Rec8bb1f51c2243e4">
             <a:alphaModFix amt="28000"/>
           </a:blip>
           <a:stretch xmlns:a="http://schemas.openxmlformats.org/drawingml/2006/main"/>
@@ -1664,7 +1664,7 @@
           <p:nvPr/>
         </p:nvPicPr>
         <p:blipFill rotWithShape="1">
-          <a:blip xmlns:r="http://schemas.openxmlformats.org/officeDocument/2006/relationships" xmlns:a="http://schemas.openxmlformats.org/drawingml/2006/main" r:embed="R63babb2df45f43a4">
+          <a:blip xmlns:r="http://schemas.openxmlformats.org/officeDocument/2006/relationships" xmlns:a="http://schemas.openxmlformats.org/drawingml/2006/main" r:embed="Rbd073574d05643ba">
             <a:alphaModFix amt="28000"/>
           </a:blip>
           <a:stretch xmlns:a="http://schemas.openxmlformats.org/drawingml/2006/main"/>
@@ -1899,7 +1899,7 @@
           <p:nvPr/>
         </p:nvPicPr>
         <p:blipFill rotWithShape="1">
-          <a:blip xmlns:r="http://schemas.openxmlformats.org/officeDocument/2006/relationships" xmlns:a="http://schemas.openxmlformats.org/drawingml/2006/main" r:embed="R3ab0a7786493413a">
+          <a:blip xmlns:r="http://schemas.openxmlformats.org/officeDocument/2006/relationships" xmlns:a="http://schemas.openxmlformats.org/drawingml/2006/main" r:embed="R846e399867814ad4">
             <a:alphaModFix amt="28000"/>
           </a:blip>
           <a:stretch xmlns:a="http://schemas.openxmlformats.org/drawingml/2006/main"/>
@@ -2176,7 +2176,7 @@
           <p:nvPr/>
         </p:nvPicPr>
         <p:blipFill rotWithShape="1">
-          <a:blip xmlns:r="http://schemas.openxmlformats.org/officeDocument/2006/relationships" xmlns:a="http://schemas.openxmlformats.org/drawingml/2006/main" r:embed="R9be74861e5934bea">
+          <a:blip xmlns:r="http://schemas.openxmlformats.org/officeDocument/2006/relationships" xmlns:a="http://schemas.openxmlformats.org/drawingml/2006/main" r:embed="R2ebb09686cb04b82">
             <a:alphaModFix amt="28000"/>
           </a:blip>
           <a:stretch xmlns:a="http://schemas.openxmlformats.org/drawingml/2006/main"/>
@@ -2451,7 +2451,7 @@
           <p:nvPr/>
         </p:nvPicPr>
         <p:blipFill rotWithShape="1">
-          <a:blip xmlns:r="http://schemas.openxmlformats.org/officeDocument/2006/relationships" xmlns:a="http://schemas.openxmlformats.org/drawingml/2006/main" r:embed="R11dd7d78420543c2">
+          <a:blip xmlns:r="http://schemas.openxmlformats.org/officeDocument/2006/relationships" xmlns:a="http://schemas.openxmlformats.org/drawingml/2006/main" r:embed="R0128ad9f451e4804">
             <a:alphaModFix amt="28000"/>
           </a:blip>
           <a:stretch xmlns:a="http://schemas.openxmlformats.org/drawingml/2006/main"/>
@@ -2875,7 +2875,7 @@
           <p:nvPr/>
         </p:nvPicPr>
         <p:blipFill rotWithShape="1">
-          <a:blip xmlns:r="http://schemas.openxmlformats.org/officeDocument/2006/relationships" xmlns:a="http://schemas.openxmlformats.org/drawingml/2006/main" r:embed="Rfd8d248c255e4875">
+          <a:blip xmlns:r="http://schemas.openxmlformats.org/officeDocument/2006/relationships" xmlns:a="http://schemas.openxmlformats.org/drawingml/2006/main" r:embed="R38563a5e914844a9">
             <a:alphaModFix amt="28000"/>
           </a:blip>
           <a:stretch xmlns:a="http://schemas.openxmlformats.org/drawingml/2006/main"/>
@@ -3016,7 +3016,7 @@
           <p:nvPr/>
         </p:nvPicPr>
         <p:blipFill rotWithShape="1">
-          <a:blip xmlns:r="http://schemas.openxmlformats.org/officeDocument/2006/relationships" xmlns:a="http://schemas.openxmlformats.org/drawingml/2006/main" r:embed="Rf8ec0968dc64420f">
+          <a:blip xmlns:r="http://schemas.openxmlformats.org/officeDocument/2006/relationships" xmlns:a="http://schemas.openxmlformats.org/drawingml/2006/main" r:embed="Rd9fdd1ee14884553">
             <a:alphaModFix amt="28000"/>
           </a:blip>
           <a:stretch xmlns:a="http://schemas.openxmlformats.org/drawingml/2006/main"/>
@@ -3130,7 +3130,7 @@
           <p:nvPr/>
         </p:nvPicPr>
         <p:blipFill rotWithShape="1">
-          <a:blip xmlns:r="http://schemas.openxmlformats.org/officeDocument/2006/relationships" xmlns:a="http://schemas.openxmlformats.org/drawingml/2006/main" r:embed="Rb8a0cd37c9744832">
+          <a:blip xmlns:r="http://schemas.openxmlformats.org/officeDocument/2006/relationships" xmlns:a="http://schemas.openxmlformats.org/drawingml/2006/main" r:embed="R3a7efdd1ddd943fb">
             <a:alphaModFix amt="28000"/>
           </a:blip>
           <a:stretch xmlns:a="http://schemas.openxmlformats.org/drawingml/2006/main"/>
@@ -3457,7 +3457,7 @@
           <p:nvPr/>
         </p:nvPicPr>
         <p:blipFill rotWithShape="1">
-          <a:blip xmlns:r="http://schemas.openxmlformats.org/officeDocument/2006/relationships" xmlns:a="http://schemas.openxmlformats.org/drawingml/2006/main" r:embed="R4c4cc1447a9340b2">
+          <a:blip xmlns:r="http://schemas.openxmlformats.org/officeDocument/2006/relationships" xmlns:a="http://schemas.openxmlformats.org/drawingml/2006/main" r:embed="R4d08ed9b1a8e41f7">
             <a:alphaModFix amt="28000"/>
           </a:blip>
           <a:stretch xmlns:a="http://schemas.openxmlformats.org/drawingml/2006/main"/>
@@ -3745,7 +3745,7 @@
           <p:nvPr/>
         </p:nvPicPr>
         <p:blipFill rotWithShape="1">
-          <a:blip xmlns:r="http://schemas.openxmlformats.org/officeDocument/2006/relationships" xmlns:a="http://schemas.openxmlformats.org/drawingml/2006/main" r:embed="R3d85b7593bba4ac9">
+          <a:blip xmlns:r="http://schemas.openxmlformats.org/officeDocument/2006/relationships" xmlns:a="http://schemas.openxmlformats.org/drawingml/2006/main" r:embed="Ra87c697260104566">
             <a:alphaModFix amt="28000"/>
           </a:blip>
           <a:stretch xmlns:a="http://schemas.openxmlformats.org/drawingml/2006/main"/>
@@ -3982,17 +3982,17 @@
   </p:cSld>
   <p:clrMap bg1="lt1" tx1="dk1" bg2="lt2" tx2="dk2" accent1="accent1" accent2="accent2" accent3="accent3" accent4="accent4" accent5="accent5" accent6="accent6" hlink="hlink" folHlink="folHlink"/>
   <p:sldLayoutIdLst>
-    <p:sldLayoutId xmlns:r="http://schemas.openxmlformats.org/officeDocument/2006/relationships" id="2147483649" r:id="R9b26f5bf2b4f4bc6"/>
-    <p:sldLayoutId xmlns:r="http://schemas.openxmlformats.org/officeDocument/2006/relationships" id="2147483650" r:id="R3f0e4154621f4090"/>
-    <p:sldLayoutId xmlns:r="http://schemas.openxmlformats.org/officeDocument/2006/relationships" id="2147483651" r:id="Rf8c6b47d2ce24854"/>
-    <p:sldLayoutId xmlns:r="http://schemas.openxmlformats.org/officeDocument/2006/relationships" id="2147483652" r:id="Rbaaf4d9df8b846a2"/>
-    <p:sldLayoutId xmlns:r="http://schemas.openxmlformats.org/officeDocument/2006/relationships" id="2147483653" r:id="R912483d2437d4132"/>
-    <p:sldLayoutId xmlns:r="http://schemas.openxmlformats.org/officeDocument/2006/relationships" id="2147483654" r:id="R210f902bbba54c53"/>
-    <p:sldLayoutId xmlns:r="http://schemas.openxmlformats.org/officeDocument/2006/relationships" id="2147483655" r:id="R937a14b8e0464612"/>
-    <p:sldLayoutId xmlns:r="http://schemas.openxmlformats.org/officeDocument/2006/relationships" id="2147483656" r:id="Ra2a45e6185514290"/>
-    <p:sldLayoutId xmlns:r="http://schemas.openxmlformats.org/officeDocument/2006/relationships" id="2147483657" r:id="Rea3c354156a04c1e"/>
-    <p:sldLayoutId xmlns:r="http://schemas.openxmlformats.org/officeDocument/2006/relationships" id="2147483658" r:id="Rd267c1ee158846e7"/>
-    <p:sldLayoutId xmlns:r="http://schemas.openxmlformats.org/officeDocument/2006/relationships" id="2147483659" r:id="R2c6cc5ed5e9740f5"/>
+    <p:sldLayoutId xmlns:r="http://schemas.openxmlformats.org/officeDocument/2006/relationships" id="2147483649" r:id="Rbbe15879fd9f4f34"/>
+    <p:sldLayoutId xmlns:r="http://schemas.openxmlformats.org/officeDocument/2006/relationships" id="2147483650" r:id="R23df5150e9b442a1"/>
+    <p:sldLayoutId xmlns:r="http://schemas.openxmlformats.org/officeDocument/2006/relationships" id="2147483651" r:id="Rb9ac3f7015634b39"/>
+    <p:sldLayoutId xmlns:r="http://schemas.openxmlformats.org/officeDocument/2006/relationships" id="2147483652" r:id="Rc3d43cda6181496a"/>
+    <p:sldLayoutId xmlns:r="http://schemas.openxmlformats.org/officeDocument/2006/relationships" id="2147483653" r:id="R00c557597a804fba"/>
+    <p:sldLayoutId xmlns:r="http://schemas.openxmlformats.org/officeDocument/2006/relationships" id="2147483654" r:id="R562aeb069c494a06"/>
+    <p:sldLayoutId xmlns:r="http://schemas.openxmlformats.org/officeDocument/2006/relationships" id="2147483655" r:id="Rda6d572694ff4b09"/>
+    <p:sldLayoutId xmlns:r="http://schemas.openxmlformats.org/officeDocument/2006/relationships" id="2147483656" r:id="Raec892a7beb5476f"/>
+    <p:sldLayoutId xmlns:r="http://schemas.openxmlformats.org/officeDocument/2006/relationships" id="2147483657" r:id="Rba35dd45bf9e443c"/>
+    <p:sldLayoutId xmlns:r="http://schemas.openxmlformats.org/officeDocument/2006/relationships" id="2147483658" r:id="Rbf9b9e95b4294b19"/>
+    <p:sldLayoutId xmlns:r="http://schemas.openxmlformats.org/officeDocument/2006/relationships" id="2147483659" r:id="R93346a7e73854617"/>
   </p:sldLayoutIdLst>
   <p:hf hdr="0" ftr="0" dt="0"/>
   <p:txStyles>
@@ -4898,7 +4898,7 @@
             <a:r>
               <a:rPr sz="2400">
                 <a:solidFill>
-                  <a:srgbClr val="1750EB"/>
+                  <a:srgbClr val="C45E00"/>
                 </a:solidFill>
                 <a:latin typeface="JetBrains Mono"/>
                 <a:ea typeface="JetBrains Mono"/>
@@ -5339,7 +5339,7 @@
             <a:r>
               <a:rPr sz="2400">
                 <a:solidFill>
-                  <a:srgbClr val="1750EB"/>
+                  <a:srgbClr val="C45E00"/>
                 </a:solidFill>
                 <a:latin typeface="JetBrains Mono"/>
                 <a:ea typeface="JetBrains Mono"/>
@@ -5780,7 +5780,7 @@
             <a:r>
               <a:rPr sz="2400">
                 <a:solidFill>
-                  <a:srgbClr val="1750EB"/>
+                  <a:srgbClr val="C45E00"/>
                 </a:solidFill>
                 <a:latin typeface="JetBrains Mono"/>
                 <a:ea typeface="JetBrains Mono"/>
@@ -6472,7 +6472,7 @@
             <a:r>
               <a:rPr sz="1600">
                 <a:solidFill>
-                  <a:srgbClr val="1750EB"/>
+                  <a:srgbClr val="C45E00"/>
                 </a:solidFill>
                 <a:latin typeface="JetBrains Mono"/>
                 <a:ea typeface="JetBrains Mono"/>
@@ -7119,7 +7119,7 @@
             <a:r>
               <a:rPr sz="1600">
                 <a:solidFill>
-                  <a:srgbClr val="1750EB"/>
+                  <a:srgbClr val="C45E00"/>
                 </a:solidFill>
                 <a:latin typeface="JetBrains Mono"/>
                 <a:ea typeface="JetBrains Mono"/>
@@ -7722,7 +7722,7 @@
             <a:r>
               <a:rPr sz="1600">
                 <a:solidFill>
-                  <a:srgbClr val="1750EB"/>
+                  <a:srgbClr val="C45E00"/>
                 </a:solidFill>
                 <a:latin typeface="JetBrains Mono"/>
                 <a:ea typeface="JetBrains Mono"/>
@@ -8369,7 +8369,7 @@
             <a:r>
               <a:rPr sz="1600">
                 <a:solidFill>
-                  <a:srgbClr val="1750EB"/>
+                  <a:srgbClr val="C45E00"/>
                 </a:solidFill>
                 <a:latin typeface="JetBrains Mono"/>
                 <a:ea typeface="JetBrains Mono"/>
@@ -8664,7 +8664,7 @@
             <a:r>
               <a:rPr sz="1800">
                 <a:solidFill>
-                  <a:srgbClr val="1750EB"/>
+                  <a:srgbClr val="C45E00"/>
                 </a:solidFill>
                 <a:latin typeface="JetBrains Mono"/>
                 <a:ea typeface="JetBrains Mono"/>

--- a/Mapped Curriculum Lessons/Grade 8/Lesson 32 - Functions/Functions - Slides.pptx
+++ b/Mapped Curriculum Lessons/Grade 8/Lesson 32 - Functions/Functions - Slides.pptx
@@ -2,28 +2,28 @@
 <file path=ppt/presentation.xml><?xml version="1.0" encoding="utf-8"?>
 <p:presentation xmlns:p="http://schemas.openxmlformats.org/presentationml/2006/main" embedTrueTypeFonts="1" saveSubsetFonts="0">
   <p:sldMasterIdLst>
-    <p:sldMasterId xmlns:r="http://schemas.openxmlformats.org/officeDocument/2006/relationships" id="2147483648" r:id="R75a358977962464a"/>
+    <p:sldMasterId xmlns:r="http://schemas.openxmlformats.org/officeDocument/2006/relationships" id="2147483648" r:id="Rabfdabfb66524ec8"/>
   </p:sldMasterIdLst>
   <p:notesMasterIdLst>
-    <p:notesMasterId xmlns:r="http://schemas.openxmlformats.org/officeDocument/2006/relationships" r:id="Rc6c499530b34440f"/>
+    <p:notesMasterId xmlns:r="http://schemas.openxmlformats.org/officeDocument/2006/relationships" r:id="Rc4663411889d4026"/>
   </p:notesMasterIdLst>
   <p:sldIdLst>
-    <p:sldId xmlns:r="http://schemas.openxmlformats.org/officeDocument/2006/relationships" id="256" r:id="Rfd8a91a3f3314e7f"/>
-    <p:sldId xmlns:r="http://schemas.openxmlformats.org/officeDocument/2006/relationships" id="257" r:id="R6980b8079aaf4617"/>
-    <p:sldId xmlns:r="http://schemas.openxmlformats.org/officeDocument/2006/relationships" id="258" r:id="R3d90df64d8e64e22"/>
-    <p:sldId xmlns:r="http://schemas.openxmlformats.org/officeDocument/2006/relationships" id="259" r:id="R0b4f9210bf824a03"/>
-    <p:sldId xmlns:r="http://schemas.openxmlformats.org/officeDocument/2006/relationships" id="260" r:id="Rbd1b64300f114da4"/>
-    <p:sldId xmlns:r="http://schemas.openxmlformats.org/officeDocument/2006/relationships" id="261" r:id="R040318237bce484a"/>
-    <p:sldId xmlns:r="http://schemas.openxmlformats.org/officeDocument/2006/relationships" id="262" r:id="Rf85765e1276945f9"/>
-    <p:sldId xmlns:r="http://schemas.openxmlformats.org/officeDocument/2006/relationships" id="263" r:id="Rdbddd9f8d3a844ed"/>
-    <p:sldId xmlns:r="http://schemas.openxmlformats.org/officeDocument/2006/relationships" id="264" r:id="R3ba9e8867262403b"/>
+    <p:sldId xmlns:r="http://schemas.openxmlformats.org/officeDocument/2006/relationships" id="256" r:id="Ra422cf5d60134086"/>
+    <p:sldId xmlns:r="http://schemas.openxmlformats.org/officeDocument/2006/relationships" id="257" r:id="R97724f003f944974"/>
+    <p:sldId xmlns:r="http://schemas.openxmlformats.org/officeDocument/2006/relationships" id="258" r:id="R33c6927e94f44c7f"/>
+    <p:sldId xmlns:r="http://schemas.openxmlformats.org/officeDocument/2006/relationships" id="259" r:id="R612dec67240a4992"/>
+    <p:sldId xmlns:r="http://schemas.openxmlformats.org/officeDocument/2006/relationships" id="260" r:id="R1fef0e4c60704dbb"/>
+    <p:sldId xmlns:r="http://schemas.openxmlformats.org/officeDocument/2006/relationships" id="261" r:id="R33b8712b21cd44b7"/>
+    <p:sldId xmlns:r="http://schemas.openxmlformats.org/officeDocument/2006/relationships" id="262" r:id="Reb95c86a669d4d8f"/>
+    <p:sldId xmlns:r="http://schemas.openxmlformats.org/officeDocument/2006/relationships" id="263" r:id="R0f70a829be854b85"/>
+    <p:sldId xmlns:r="http://schemas.openxmlformats.org/officeDocument/2006/relationships" id="264" r:id="R5c9f749c18914b13"/>
   </p:sldIdLst>
   <p:sldSz cx="12192000" cy="6858000"/>
   <p:notesSz cx="6858000" cy="9144000"/>
   <p:embeddedFontLst>
     <p:embeddedFont>
       <p:font typeface="JetBrains Mono"/>
-      <p:regular xmlns:r="http://schemas.openxmlformats.org/officeDocument/2006/relationships" r:id="R7b80e7426ff6481e"/>
+      <p:regular xmlns:r="http://schemas.openxmlformats.org/officeDocument/2006/relationships" r:id="Re5be8b66d60f4ddf"/>
     </p:embeddedFont>
   </p:embeddedFontLst>
 </p:presentation>
@@ -1071,7 +1071,7 @@
           <p:nvPr/>
         </p:nvPicPr>
         <p:blipFill rotWithShape="1">
-          <a:blip xmlns:r="http://schemas.openxmlformats.org/officeDocument/2006/relationships" xmlns:a="http://schemas.openxmlformats.org/drawingml/2006/main" r:embed="R699985d9b0034a2c"/>
+          <a:blip xmlns:r="http://schemas.openxmlformats.org/officeDocument/2006/relationships" xmlns:a="http://schemas.openxmlformats.org/drawingml/2006/main" r:embed="Rc8eaa26332ed45f3"/>
           <a:stretch xmlns:a="http://schemas.openxmlformats.org/drawingml/2006/main"/>
         </p:blipFill>
         <p:spPr>
@@ -1451,7 +1451,7 @@
           <p:nvPr/>
         </p:nvPicPr>
         <p:blipFill rotWithShape="1">
-          <a:blip xmlns:r="http://schemas.openxmlformats.org/officeDocument/2006/relationships" xmlns:a="http://schemas.openxmlformats.org/drawingml/2006/main" r:embed="Rec8bb1f51c2243e4">
+          <a:blip xmlns:r="http://schemas.openxmlformats.org/officeDocument/2006/relationships" xmlns:a="http://schemas.openxmlformats.org/drawingml/2006/main" r:embed="Rddeaa6693a954d9f">
             <a:alphaModFix amt="28000"/>
           </a:blip>
           <a:stretch xmlns:a="http://schemas.openxmlformats.org/drawingml/2006/main"/>
@@ -1664,7 +1664,7 @@
           <p:nvPr/>
         </p:nvPicPr>
         <p:blipFill rotWithShape="1">
-          <a:blip xmlns:r="http://schemas.openxmlformats.org/officeDocument/2006/relationships" xmlns:a="http://schemas.openxmlformats.org/drawingml/2006/main" r:embed="Rbd073574d05643ba">
+          <a:blip xmlns:r="http://schemas.openxmlformats.org/officeDocument/2006/relationships" xmlns:a="http://schemas.openxmlformats.org/drawingml/2006/main" r:embed="Rae8c26afecd54eb3">
             <a:alphaModFix amt="28000"/>
           </a:blip>
           <a:stretch xmlns:a="http://schemas.openxmlformats.org/drawingml/2006/main"/>
@@ -1899,7 +1899,7 @@
           <p:nvPr/>
         </p:nvPicPr>
         <p:blipFill rotWithShape="1">
-          <a:blip xmlns:r="http://schemas.openxmlformats.org/officeDocument/2006/relationships" xmlns:a="http://schemas.openxmlformats.org/drawingml/2006/main" r:embed="R846e399867814ad4">
+          <a:blip xmlns:r="http://schemas.openxmlformats.org/officeDocument/2006/relationships" xmlns:a="http://schemas.openxmlformats.org/drawingml/2006/main" r:embed="R46973a5b263f423a">
             <a:alphaModFix amt="28000"/>
           </a:blip>
           <a:stretch xmlns:a="http://schemas.openxmlformats.org/drawingml/2006/main"/>
@@ -2176,7 +2176,7 @@
           <p:nvPr/>
         </p:nvPicPr>
         <p:blipFill rotWithShape="1">
-          <a:blip xmlns:r="http://schemas.openxmlformats.org/officeDocument/2006/relationships" xmlns:a="http://schemas.openxmlformats.org/drawingml/2006/main" r:embed="R2ebb09686cb04b82">
+          <a:blip xmlns:r="http://schemas.openxmlformats.org/officeDocument/2006/relationships" xmlns:a="http://schemas.openxmlformats.org/drawingml/2006/main" r:embed="Rdaed7030269a4c3d">
             <a:alphaModFix amt="28000"/>
           </a:blip>
           <a:stretch xmlns:a="http://schemas.openxmlformats.org/drawingml/2006/main"/>
@@ -2451,7 +2451,7 @@
           <p:nvPr/>
         </p:nvPicPr>
         <p:blipFill rotWithShape="1">
-          <a:blip xmlns:r="http://schemas.openxmlformats.org/officeDocument/2006/relationships" xmlns:a="http://schemas.openxmlformats.org/drawingml/2006/main" r:embed="R0128ad9f451e4804">
+          <a:blip xmlns:r="http://schemas.openxmlformats.org/officeDocument/2006/relationships" xmlns:a="http://schemas.openxmlformats.org/drawingml/2006/main" r:embed="R3d95b46a25674b08">
             <a:alphaModFix amt="28000"/>
           </a:blip>
           <a:stretch xmlns:a="http://schemas.openxmlformats.org/drawingml/2006/main"/>
@@ -2875,7 +2875,7 @@
           <p:nvPr/>
         </p:nvPicPr>
         <p:blipFill rotWithShape="1">
-          <a:blip xmlns:r="http://schemas.openxmlformats.org/officeDocument/2006/relationships" xmlns:a="http://schemas.openxmlformats.org/drawingml/2006/main" r:embed="R38563a5e914844a9">
+          <a:blip xmlns:r="http://schemas.openxmlformats.org/officeDocument/2006/relationships" xmlns:a="http://schemas.openxmlformats.org/drawingml/2006/main" r:embed="R57b269ab78bb4359">
             <a:alphaModFix amt="28000"/>
           </a:blip>
           <a:stretch xmlns:a="http://schemas.openxmlformats.org/drawingml/2006/main"/>
@@ -3016,7 +3016,7 @@
           <p:nvPr/>
         </p:nvPicPr>
         <p:blipFill rotWithShape="1">
-          <a:blip xmlns:r="http://schemas.openxmlformats.org/officeDocument/2006/relationships" xmlns:a="http://schemas.openxmlformats.org/drawingml/2006/main" r:embed="Rd9fdd1ee14884553">
+          <a:blip xmlns:r="http://schemas.openxmlformats.org/officeDocument/2006/relationships" xmlns:a="http://schemas.openxmlformats.org/drawingml/2006/main" r:embed="R20cf61df7dbe41c5">
             <a:alphaModFix amt="28000"/>
           </a:blip>
           <a:stretch xmlns:a="http://schemas.openxmlformats.org/drawingml/2006/main"/>
@@ -3130,7 +3130,7 @@
           <p:nvPr/>
         </p:nvPicPr>
         <p:blipFill rotWithShape="1">
-          <a:blip xmlns:r="http://schemas.openxmlformats.org/officeDocument/2006/relationships" xmlns:a="http://schemas.openxmlformats.org/drawingml/2006/main" r:embed="R3a7efdd1ddd943fb">
+          <a:blip xmlns:r="http://schemas.openxmlformats.org/officeDocument/2006/relationships" xmlns:a="http://schemas.openxmlformats.org/drawingml/2006/main" r:embed="R40808d12d2274fdb">
             <a:alphaModFix amt="28000"/>
           </a:blip>
           <a:stretch xmlns:a="http://schemas.openxmlformats.org/drawingml/2006/main"/>
@@ -3457,7 +3457,7 @@
           <p:nvPr/>
         </p:nvPicPr>
         <p:blipFill rotWithShape="1">
-          <a:blip xmlns:r="http://schemas.openxmlformats.org/officeDocument/2006/relationships" xmlns:a="http://schemas.openxmlformats.org/drawingml/2006/main" r:embed="R4d08ed9b1a8e41f7">
+          <a:blip xmlns:r="http://schemas.openxmlformats.org/officeDocument/2006/relationships" xmlns:a="http://schemas.openxmlformats.org/drawingml/2006/main" r:embed="R2bd78f41975b4482">
             <a:alphaModFix amt="28000"/>
           </a:blip>
           <a:stretch xmlns:a="http://schemas.openxmlformats.org/drawingml/2006/main"/>
@@ -3745,7 +3745,7 @@
           <p:nvPr/>
         </p:nvPicPr>
         <p:blipFill rotWithShape="1">
-          <a:blip xmlns:r="http://schemas.openxmlformats.org/officeDocument/2006/relationships" xmlns:a="http://schemas.openxmlformats.org/drawingml/2006/main" r:embed="Ra87c697260104566">
+          <a:blip xmlns:r="http://schemas.openxmlformats.org/officeDocument/2006/relationships" xmlns:a="http://schemas.openxmlformats.org/drawingml/2006/main" r:embed="R8f620e5123f4466b">
             <a:alphaModFix amt="28000"/>
           </a:blip>
           <a:stretch xmlns:a="http://schemas.openxmlformats.org/drawingml/2006/main"/>
@@ -3982,17 +3982,17 @@
   </p:cSld>
   <p:clrMap bg1="lt1" tx1="dk1" bg2="lt2" tx2="dk2" accent1="accent1" accent2="accent2" accent3="accent3" accent4="accent4" accent5="accent5" accent6="accent6" hlink="hlink" folHlink="folHlink"/>
   <p:sldLayoutIdLst>
-    <p:sldLayoutId xmlns:r="http://schemas.openxmlformats.org/officeDocument/2006/relationships" id="2147483649" r:id="Rbbe15879fd9f4f34"/>
-    <p:sldLayoutId xmlns:r="http://schemas.openxmlformats.org/officeDocument/2006/relationships" id="2147483650" r:id="R23df5150e9b442a1"/>
-    <p:sldLayoutId xmlns:r="http://schemas.openxmlformats.org/officeDocument/2006/relationships" id="2147483651" r:id="Rb9ac3f7015634b39"/>
-    <p:sldLayoutId xmlns:r="http://schemas.openxmlformats.org/officeDocument/2006/relationships" id="2147483652" r:id="Rc3d43cda6181496a"/>
-    <p:sldLayoutId xmlns:r="http://schemas.openxmlformats.org/officeDocument/2006/relationships" id="2147483653" r:id="R00c557597a804fba"/>
-    <p:sldLayoutId xmlns:r="http://schemas.openxmlformats.org/officeDocument/2006/relationships" id="2147483654" r:id="R562aeb069c494a06"/>
-    <p:sldLayoutId xmlns:r="http://schemas.openxmlformats.org/officeDocument/2006/relationships" id="2147483655" r:id="Rda6d572694ff4b09"/>
-    <p:sldLayoutId xmlns:r="http://schemas.openxmlformats.org/officeDocument/2006/relationships" id="2147483656" r:id="Raec892a7beb5476f"/>
-    <p:sldLayoutId xmlns:r="http://schemas.openxmlformats.org/officeDocument/2006/relationships" id="2147483657" r:id="Rba35dd45bf9e443c"/>
-    <p:sldLayoutId xmlns:r="http://schemas.openxmlformats.org/officeDocument/2006/relationships" id="2147483658" r:id="Rbf9b9e95b4294b19"/>
-    <p:sldLayoutId xmlns:r="http://schemas.openxmlformats.org/officeDocument/2006/relationships" id="2147483659" r:id="R93346a7e73854617"/>
+    <p:sldLayoutId xmlns:r="http://schemas.openxmlformats.org/officeDocument/2006/relationships" id="2147483649" r:id="Rb07911c9e823465d"/>
+    <p:sldLayoutId xmlns:r="http://schemas.openxmlformats.org/officeDocument/2006/relationships" id="2147483650" r:id="R7c0462e105f14bac"/>
+    <p:sldLayoutId xmlns:r="http://schemas.openxmlformats.org/officeDocument/2006/relationships" id="2147483651" r:id="Re1b9e9348432475c"/>
+    <p:sldLayoutId xmlns:r="http://schemas.openxmlformats.org/officeDocument/2006/relationships" id="2147483652" r:id="R5f452b674eb14f38"/>
+    <p:sldLayoutId xmlns:r="http://schemas.openxmlformats.org/officeDocument/2006/relationships" id="2147483653" r:id="R8a126b5799fa4a3c"/>
+    <p:sldLayoutId xmlns:r="http://schemas.openxmlformats.org/officeDocument/2006/relationships" id="2147483654" r:id="R50bdb227f7cb42e8"/>
+    <p:sldLayoutId xmlns:r="http://schemas.openxmlformats.org/officeDocument/2006/relationships" id="2147483655" r:id="Rbc24884ec17c4a23"/>
+    <p:sldLayoutId xmlns:r="http://schemas.openxmlformats.org/officeDocument/2006/relationships" id="2147483656" r:id="R2af68a1362ec4681"/>
+    <p:sldLayoutId xmlns:r="http://schemas.openxmlformats.org/officeDocument/2006/relationships" id="2147483657" r:id="Rc61184ed0df44c9b"/>
+    <p:sldLayoutId xmlns:r="http://schemas.openxmlformats.org/officeDocument/2006/relationships" id="2147483658" r:id="Rfda2af9303b448c4"/>
+    <p:sldLayoutId xmlns:r="http://schemas.openxmlformats.org/officeDocument/2006/relationships" id="2147483659" r:id="Rfc5c19d9d62c46c9"/>
   </p:sldLayoutIdLst>
   <p:hf hdr="0" ftr="0" dt="0"/>
   <p:txStyles>

--- a/Mapped Curriculum Lessons/Grade 8/Lesson 32 - Functions/Functions - Slides.pptx
+++ b/Mapped Curriculum Lessons/Grade 8/Lesson 32 - Functions/Functions - Slides.pptx
@@ -2,28 +2,28 @@
 <file path=ppt/presentation.xml><?xml version="1.0" encoding="utf-8"?>
 <p:presentation xmlns:p="http://schemas.openxmlformats.org/presentationml/2006/main" embedTrueTypeFonts="1" saveSubsetFonts="0">
   <p:sldMasterIdLst>
-    <p:sldMasterId xmlns:r="http://schemas.openxmlformats.org/officeDocument/2006/relationships" id="2147483648" r:id="Rabfdabfb66524ec8"/>
+    <p:sldMasterId xmlns:r="http://schemas.openxmlformats.org/officeDocument/2006/relationships" id="2147483648" r:id="Rf74fda9b51574fa1"/>
   </p:sldMasterIdLst>
   <p:notesMasterIdLst>
-    <p:notesMasterId xmlns:r="http://schemas.openxmlformats.org/officeDocument/2006/relationships" r:id="Rc4663411889d4026"/>
+    <p:notesMasterId xmlns:r="http://schemas.openxmlformats.org/officeDocument/2006/relationships" r:id="R6daadd8259844281"/>
   </p:notesMasterIdLst>
   <p:sldIdLst>
-    <p:sldId xmlns:r="http://schemas.openxmlformats.org/officeDocument/2006/relationships" id="256" r:id="Ra422cf5d60134086"/>
-    <p:sldId xmlns:r="http://schemas.openxmlformats.org/officeDocument/2006/relationships" id="257" r:id="R97724f003f944974"/>
-    <p:sldId xmlns:r="http://schemas.openxmlformats.org/officeDocument/2006/relationships" id="258" r:id="R33c6927e94f44c7f"/>
-    <p:sldId xmlns:r="http://schemas.openxmlformats.org/officeDocument/2006/relationships" id="259" r:id="R612dec67240a4992"/>
-    <p:sldId xmlns:r="http://schemas.openxmlformats.org/officeDocument/2006/relationships" id="260" r:id="R1fef0e4c60704dbb"/>
-    <p:sldId xmlns:r="http://schemas.openxmlformats.org/officeDocument/2006/relationships" id="261" r:id="R33b8712b21cd44b7"/>
-    <p:sldId xmlns:r="http://schemas.openxmlformats.org/officeDocument/2006/relationships" id="262" r:id="Reb95c86a669d4d8f"/>
-    <p:sldId xmlns:r="http://schemas.openxmlformats.org/officeDocument/2006/relationships" id="263" r:id="R0f70a829be854b85"/>
-    <p:sldId xmlns:r="http://schemas.openxmlformats.org/officeDocument/2006/relationships" id="264" r:id="R5c9f749c18914b13"/>
+    <p:sldId xmlns:r="http://schemas.openxmlformats.org/officeDocument/2006/relationships" id="256" r:id="R52914550408a4843"/>
+    <p:sldId xmlns:r="http://schemas.openxmlformats.org/officeDocument/2006/relationships" id="257" r:id="Rf83265278390471d"/>
+    <p:sldId xmlns:r="http://schemas.openxmlformats.org/officeDocument/2006/relationships" id="258" r:id="R4d5513c944c74505"/>
+    <p:sldId xmlns:r="http://schemas.openxmlformats.org/officeDocument/2006/relationships" id="259" r:id="R5180d3f462f64ee8"/>
+    <p:sldId xmlns:r="http://schemas.openxmlformats.org/officeDocument/2006/relationships" id="260" r:id="Rbd91967704a7444a"/>
+    <p:sldId xmlns:r="http://schemas.openxmlformats.org/officeDocument/2006/relationships" id="261" r:id="R8a285e52e16b47f0"/>
+    <p:sldId xmlns:r="http://schemas.openxmlformats.org/officeDocument/2006/relationships" id="262" r:id="R605c3a429d094011"/>
+    <p:sldId xmlns:r="http://schemas.openxmlformats.org/officeDocument/2006/relationships" id="263" r:id="R26dc1d92c2694472"/>
+    <p:sldId xmlns:r="http://schemas.openxmlformats.org/officeDocument/2006/relationships" id="264" r:id="Rece6ac2dc5ec41b7"/>
   </p:sldIdLst>
   <p:sldSz cx="12192000" cy="6858000"/>
   <p:notesSz cx="6858000" cy="9144000"/>
   <p:embeddedFontLst>
     <p:embeddedFont>
       <p:font typeface="JetBrains Mono"/>
-      <p:regular xmlns:r="http://schemas.openxmlformats.org/officeDocument/2006/relationships" r:id="Re5be8b66d60f4ddf"/>
+      <p:regular xmlns:r="http://schemas.openxmlformats.org/officeDocument/2006/relationships" r:id="R4286b357b4ac48ad"/>
     </p:embeddedFont>
   </p:embeddedFontLst>
 </p:presentation>
@@ -1071,7 +1071,7 @@
           <p:nvPr/>
         </p:nvPicPr>
         <p:blipFill rotWithShape="1">
-          <a:blip xmlns:r="http://schemas.openxmlformats.org/officeDocument/2006/relationships" xmlns:a="http://schemas.openxmlformats.org/drawingml/2006/main" r:embed="Rc8eaa26332ed45f3"/>
+          <a:blip xmlns:r="http://schemas.openxmlformats.org/officeDocument/2006/relationships" xmlns:a="http://schemas.openxmlformats.org/drawingml/2006/main" r:embed="R6835dab2268749ac"/>
           <a:stretch xmlns:a="http://schemas.openxmlformats.org/drawingml/2006/main"/>
         </p:blipFill>
         <p:spPr>
@@ -1451,7 +1451,7 @@
           <p:nvPr/>
         </p:nvPicPr>
         <p:blipFill rotWithShape="1">
-          <a:blip xmlns:r="http://schemas.openxmlformats.org/officeDocument/2006/relationships" xmlns:a="http://schemas.openxmlformats.org/drawingml/2006/main" r:embed="Rddeaa6693a954d9f">
+          <a:blip xmlns:r="http://schemas.openxmlformats.org/officeDocument/2006/relationships" xmlns:a="http://schemas.openxmlformats.org/drawingml/2006/main" r:embed="R482dc6a5dfb14310">
             <a:alphaModFix amt="28000"/>
           </a:blip>
           <a:stretch xmlns:a="http://schemas.openxmlformats.org/drawingml/2006/main"/>
@@ -1664,7 +1664,7 @@
           <p:nvPr/>
         </p:nvPicPr>
         <p:blipFill rotWithShape="1">
-          <a:blip xmlns:r="http://schemas.openxmlformats.org/officeDocument/2006/relationships" xmlns:a="http://schemas.openxmlformats.org/drawingml/2006/main" r:embed="Rae8c26afecd54eb3">
+          <a:blip xmlns:r="http://schemas.openxmlformats.org/officeDocument/2006/relationships" xmlns:a="http://schemas.openxmlformats.org/drawingml/2006/main" r:embed="Rf578948f20e849b0">
             <a:alphaModFix amt="28000"/>
           </a:blip>
           <a:stretch xmlns:a="http://schemas.openxmlformats.org/drawingml/2006/main"/>
@@ -1899,7 +1899,7 @@
           <p:nvPr/>
         </p:nvPicPr>
         <p:blipFill rotWithShape="1">
-          <a:blip xmlns:r="http://schemas.openxmlformats.org/officeDocument/2006/relationships" xmlns:a="http://schemas.openxmlformats.org/drawingml/2006/main" r:embed="R46973a5b263f423a">
+          <a:blip xmlns:r="http://schemas.openxmlformats.org/officeDocument/2006/relationships" xmlns:a="http://schemas.openxmlformats.org/drawingml/2006/main" r:embed="Rbe9fd70e7656446d">
             <a:alphaModFix amt="28000"/>
           </a:blip>
           <a:stretch xmlns:a="http://schemas.openxmlformats.org/drawingml/2006/main"/>
@@ -2176,7 +2176,7 @@
           <p:nvPr/>
         </p:nvPicPr>
         <p:blipFill rotWithShape="1">
-          <a:blip xmlns:r="http://schemas.openxmlformats.org/officeDocument/2006/relationships" xmlns:a="http://schemas.openxmlformats.org/drawingml/2006/main" r:embed="Rdaed7030269a4c3d">
+          <a:blip xmlns:r="http://schemas.openxmlformats.org/officeDocument/2006/relationships" xmlns:a="http://schemas.openxmlformats.org/drawingml/2006/main" r:embed="R21ccfb0b6907447b">
             <a:alphaModFix amt="28000"/>
           </a:blip>
           <a:stretch xmlns:a="http://schemas.openxmlformats.org/drawingml/2006/main"/>
@@ -2451,7 +2451,7 @@
           <p:nvPr/>
         </p:nvPicPr>
         <p:blipFill rotWithShape="1">
-          <a:blip xmlns:r="http://schemas.openxmlformats.org/officeDocument/2006/relationships" xmlns:a="http://schemas.openxmlformats.org/drawingml/2006/main" r:embed="R3d95b46a25674b08">
+          <a:blip xmlns:r="http://schemas.openxmlformats.org/officeDocument/2006/relationships" xmlns:a="http://schemas.openxmlformats.org/drawingml/2006/main" r:embed="R3dc89bc4004a47e8">
             <a:alphaModFix amt="28000"/>
           </a:blip>
           <a:stretch xmlns:a="http://schemas.openxmlformats.org/drawingml/2006/main"/>
@@ -2875,7 +2875,7 @@
           <p:nvPr/>
         </p:nvPicPr>
         <p:blipFill rotWithShape="1">
-          <a:blip xmlns:r="http://schemas.openxmlformats.org/officeDocument/2006/relationships" xmlns:a="http://schemas.openxmlformats.org/drawingml/2006/main" r:embed="R57b269ab78bb4359">
+          <a:blip xmlns:r="http://schemas.openxmlformats.org/officeDocument/2006/relationships" xmlns:a="http://schemas.openxmlformats.org/drawingml/2006/main" r:embed="Re630d30351974bc5">
             <a:alphaModFix amt="28000"/>
           </a:blip>
           <a:stretch xmlns:a="http://schemas.openxmlformats.org/drawingml/2006/main"/>
@@ -3016,7 +3016,7 @@
           <p:nvPr/>
         </p:nvPicPr>
         <p:blipFill rotWithShape="1">
-          <a:blip xmlns:r="http://schemas.openxmlformats.org/officeDocument/2006/relationships" xmlns:a="http://schemas.openxmlformats.org/drawingml/2006/main" r:embed="R20cf61df7dbe41c5">
+          <a:blip xmlns:r="http://schemas.openxmlformats.org/officeDocument/2006/relationships" xmlns:a="http://schemas.openxmlformats.org/drawingml/2006/main" r:embed="R97d9e25e5ebb464b">
             <a:alphaModFix amt="28000"/>
           </a:blip>
           <a:stretch xmlns:a="http://schemas.openxmlformats.org/drawingml/2006/main"/>
@@ -3130,7 +3130,7 @@
           <p:nvPr/>
         </p:nvPicPr>
         <p:blipFill rotWithShape="1">
-          <a:blip xmlns:r="http://schemas.openxmlformats.org/officeDocument/2006/relationships" xmlns:a="http://schemas.openxmlformats.org/drawingml/2006/main" r:embed="R40808d12d2274fdb">
+          <a:blip xmlns:r="http://schemas.openxmlformats.org/officeDocument/2006/relationships" xmlns:a="http://schemas.openxmlformats.org/drawingml/2006/main" r:embed="Rd93104acf90d4c85">
             <a:alphaModFix amt="28000"/>
           </a:blip>
           <a:stretch xmlns:a="http://schemas.openxmlformats.org/drawingml/2006/main"/>
@@ -3457,7 +3457,7 @@
           <p:nvPr/>
         </p:nvPicPr>
         <p:blipFill rotWithShape="1">
-          <a:blip xmlns:r="http://schemas.openxmlformats.org/officeDocument/2006/relationships" xmlns:a="http://schemas.openxmlformats.org/drawingml/2006/main" r:embed="R2bd78f41975b4482">
+          <a:blip xmlns:r="http://schemas.openxmlformats.org/officeDocument/2006/relationships" xmlns:a="http://schemas.openxmlformats.org/drawingml/2006/main" r:embed="R56ae5a734dee443e">
             <a:alphaModFix amt="28000"/>
           </a:blip>
           <a:stretch xmlns:a="http://schemas.openxmlformats.org/drawingml/2006/main"/>
@@ -3745,7 +3745,7 @@
           <p:nvPr/>
         </p:nvPicPr>
         <p:blipFill rotWithShape="1">
-          <a:blip xmlns:r="http://schemas.openxmlformats.org/officeDocument/2006/relationships" xmlns:a="http://schemas.openxmlformats.org/drawingml/2006/main" r:embed="R8f620e5123f4466b">
+          <a:blip xmlns:r="http://schemas.openxmlformats.org/officeDocument/2006/relationships" xmlns:a="http://schemas.openxmlformats.org/drawingml/2006/main" r:embed="R27aabcbadca9424e">
             <a:alphaModFix amt="28000"/>
           </a:blip>
           <a:stretch xmlns:a="http://schemas.openxmlformats.org/drawingml/2006/main"/>
@@ -3982,17 +3982,17 @@
   </p:cSld>
   <p:clrMap bg1="lt1" tx1="dk1" bg2="lt2" tx2="dk2" accent1="accent1" accent2="accent2" accent3="accent3" accent4="accent4" accent5="accent5" accent6="accent6" hlink="hlink" folHlink="folHlink"/>
   <p:sldLayoutIdLst>
-    <p:sldLayoutId xmlns:r="http://schemas.openxmlformats.org/officeDocument/2006/relationships" id="2147483649" r:id="Rb07911c9e823465d"/>
-    <p:sldLayoutId xmlns:r="http://schemas.openxmlformats.org/officeDocument/2006/relationships" id="2147483650" r:id="R7c0462e105f14bac"/>
-    <p:sldLayoutId xmlns:r="http://schemas.openxmlformats.org/officeDocument/2006/relationships" id="2147483651" r:id="Re1b9e9348432475c"/>
-    <p:sldLayoutId xmlns:r="http://schemas.openxmlformats.org/officeDocument/2006/relationships" id="2147483652" r:id="R5f452b674eb14f38"/>
-    <p:sldLayoutId xmlns:r="http://schemas.openxmlformats.org/officeDocument/2006/relationships" id="2147483653" r:id="R8a126b5799fa4a3c"/>
-    <p:sldLayoutId xmlns:r="http://schemas.openxmlformats.org/officeDocument/2006/relationships" id="2147483654" r:id="R50bdb227f7cb42e8"/>
-    <p:sldLayoutId xmlns:r="http://schemas.openxmlformats.org/officeDocument/2006/relationships" id="2147483655" r:id="Rbc24884ec17c4a23"/>
-    <p:sldLayoutId xmlns:r="http://schemas.openxmlformats.org/officeDocument/2006/relationships" id="2147483656" r:id="R2af68a1362ec4681"/>
-    <p:sldLayoutId xmlns:r="http://schemas.openxmlformats.org/officeDocument/2006/relationships" id="2147483657" r:id="Rc61184ed0df44c9b"/>
-    <p:sldLayoutId xmlns:r="http://schemas.openxmlformats.org/officeDocument/2006/relationships" id="2147483658" r:id="Rfda2af9303b448c4"/>
-    <p:sldLayoutId xmlns:r="http://schemas.openxmlformats.org/officeDocument/2006/relationships" id="2147483659" r:id="Rfc5c19d9d62c46c9"/>
+    <p:sldLayoutId xmlns:r="http://schemas.openxmlformats.org/officeDocument/2006/relationships" id="2147483649" r:id="Ra095204ac6834482"/>
+    <p:sldLayoutId xmlns:r="http://schemas.openxmlformats.org/officeDocument/2006/relationships" id="2147483650" r:id="R6ad085b4b8994cc0"/>
+    <p:sldLayoutId xmlns:r="http://schemas.openxmlformats.org/officeDocument/2006/relationships" id="2147483651" r:id="R2916f4d98ed14c00"/>
+    <p:sldLayoutId xmlns:r="http://schemas.openxmlformats.org/officeDocument/2006/relationships" id="2147483652" r:id="R19132b24eee1486d"/>
+    <p:sldLayoutId xmlns:r="http://schemas.openxmlformats.org/officeDocument/2006/relationships" id="2147483653" r:id="Rf554d3c17b514ec4"/>
+    <p:sldLayoutId xmlns:r="http://schemas.openxmlformats.org/officeDocument/2006/relationships" id="2147483654" r:id="Rcdac417d0e32407b"/>
+    <p:sldLayoutId xmlns:r="http://schemas.openxmlformats.org/officeDocument/2006/relationships" id="2147483655" r:id="Rf35eecbfec3e4687"/>
+    <p:sldLayoutId xmlns:r="http://schemas.openxmlformats.org/officeDocument/2006/relationships" id="2147483656" r:id="R1be366a1e8924ccc"/>
+    <p:sldLayoutId xmlns:r="http://schemas.openxmlformats.org/officeDocument/2006/relationships" id="2147483657" r:id="Rd953927a664845c5"/>
+    <p:sldLayoutId xmlns:r="http://schemas.openxmlformats.org/officeDocument/2006/relationships" id="2147483658" r:id="Rf81de7c557b3425c"/>
+    <p:sldLayoutId xmlns:r="http://schemas.openxmlformats.org/officeDocument/2006/relationships" id="2147483659" r:id="R003debcf1b3a4dd1"/>
   </p:sldLayoutIdLst>
   <p:hf hdr="0" ftr="0" dt="0"/>
   <p:txStyles>
@@ -4928,24 +4928,13 @@
             <a:r>
               <a:rPr sz="2400">
                 <a:solidFill>
-                  <a:srgbClr val="080808"/>
-                </a:solidFill>
-                <a:latin typeface="JetBrains Mono"/>
-                <a:ea typeface="JetBrains Mono"/>
-                <a:cs typeface="JetBrains Mono"/>
-              </a:rPr>
-              <a:t>    </a:t>
-            </a:r>
-            <a:r>
-              <a:rPr sz="2400">
-                <a:solidFill>
                   <a:srgbClr val="1750EB"/>
                 </a:solidFill>
                 <a:latin typeface="JetBrains Mono"/>
                 <a:ea typeface="JetBrains Mono"/>
                 <a:cs typeface="JetBrains Mono"/>
               </a:rPr>
-              <a:t>print</a:t>
+              <a:t>    print</a:t>
             </a:r>
             <a:r>
               <a:rPr sz="2400">
@@ -5369,24 +5358,13 @@
             <a:r>
               <a:rPr sz="2400">
                 <a:solidFill>
-                  <a:srgbClr val="080808"/>
-                </a:solidFill>
-                <a:latin typeface="JetBrains Mono"/>
-                <a:ea typeface="JetBrains Mono"/>
-                <a:cs typeface="JetBrains Mono"/>
-              </a:rPr>
-              <a:t>    </a:t>
-            </a:r>
-            <a:r>
-              <a:rPr sz="2400">
-                <a:solidFill>
                   <a:srgbClr val="1750EB"/>
                 </a:solidFill>
                 <a:latin typeface="JetBrains Mono"/>
                 <a:ea typeface="JetBrains Mono"/>
                 <a:cs typeface="JetBrains Mono"/>
               </a:rPr>
-              <a:t>print</a:t>
+              <a:t>    print</a:t>
             </a:r>
             <a:r>
               <a:rPr sz="2400">
@@ -5810,24 +5788,13 @@
             <a:r>
               <a:rPr sz="2400">
                 <a:solidFill>
-                  <a:srgbClr val="080808"/>
-                </a:solidFill>
-                <a:latin typeface="JetBrains Mono"/>
-                <a:ea typeface="JetBrains Mono"/>
-                <a:cs typeface="JetBrains Mono"/>
-              </a:rPr>
-              <a:t>    </a:t>
-            </a:r>
-            <a:r>
-              <a:rPr sz="2400">
-                <a:solidFill>
                   <a:srgbClr val="1750EB"/>
                 </a:solidFill>
                 <a:latin typeface="JetBrains Mono"/>
                 <a:ea typeface="JetBrains Mono"/>
                 <a:cs typeface="JetBrains Mono"/>
               </a:rPr>
-              <a:t>print</a:t>
+              <a:t>    print</a:t>
             </a:r>
             <a:r>
               <a:rPr sz="2400">
@@ -6504,24 +6471,13 @@
             <a:r>
               <a:rPr sz="1600">
                 <a:solidFill>
-                  <a:srgbClr val="080808"/>
-                </a:solidFill>
-                <a:latin typeface="JetBrains Mono"/>
-                <a:ea typeface="JetBrains Mono"/>
-                <a:cs typeface="JetBrains Mono"/>
-              </a:rPr>
-              <a:t>    </a:t>
-            </a:r>
-            <a:r>
-              <a:rPr sz="1600">
-                <a:solidFill>
                   <a:srgbClr val="1750EB"/>
                 </a:solidFill>
                 <a:latin typeface="JetBrains Mono"/>
                 <a:ea typeface="JetBrains Mono"/>
                 <a:cs typeface="JetBrains Mono"/>
               </a:rPr>
-              <a:t>print</a:t>
+              <a:t>    print</a:t>
             </a:r>
             <a:r>
               <a:rPr sz="1600">
@@ -7151,24 +7107,13 @@
             <a:r>
               <a:rPr sz="1600">
                 <a:solidFill>
-                  <a:srgbClr val="080808"/>
-                </a:solidFill>
-                <a:latin typeface="JetBrains Mono"/>
-                <a:ea typeface="JetBrains Mono"/>
-                <a:cs typeface="JetBrains Mono"/>
-              </a:rPr>
-              <a:t>    </a:t>
-            </a:r>
-            <a:r>
-              <a:rPr sz="1600">
-                <a:solidFill>
                   <a:srgbClr val="1750EB"/>
                 </a:solidFill>
                 <a:latin typeface="JetBrains Mono"/>
                 <a:ea typeface="JetBrains Mono"/>
                 <a:cs typeface="JetBrains Mono"/>
               </a:rPr>
-              <a:t>print</a:t>
+              <a:t>    print</a:t>
             </a:r>
             <a:r>
               <a:rPr sz="1600">
@@ -7754,24 +7699,13 @@
             <a:r>
               <a:rPr sz="1600">
                 <a:solidFill>
-                  <a:srgbClr val="080808"/>
-                </a:solidFill>
-                <a:latin typeface="JetBrains Mono"/>
-                <a:ea typeface="JetBrains Mono"/>
-                <a:cs typeface="JetBrains Mono"/>
-              </a:rPr>
-              <a:t>    </a:t>
-            </a:r>
-            <a:r>
-              <a:rPr sz="1600">
-                <a:solidFill>
                   <a:srgbClr val="1750EB"/>
                 </a:solidFill>
                 <a:latin typeface="JetBrains Mono"/>
                 <a:ea typeface="JetBrains Mono"/>
                 <a:cs typeface="JetBrains Mono"/>
               </a:rPr>
-              <a:t>print</a:t>
+              <a:t>    print</a:t>
             </a:r>
             <a:r>
               <a:rPr sz="1600">
@@ -8401,24 +8335,13 @@
             <a:r>
               <a:rPr sz="1600">
                 <a:solidFill>
-                  <a:srgbClr val="080808"/>
-                </a:solidFill>
-                <a:latin typeface="JetBrains Mono"/>
-                <a:ea typeface="JetBrains Mono"/>
-                <a:cs typeface="JetBrains Mono"/>
-              </a:rPr>
-              <a:t>    </a:t>
-            </a:r>
-            <a:r>
-              <a:rPr sz="1600">
-                <a:solidFill>
                   <a:srgbClr val="1750EB"/>
                 </a:solidFill>
                 <a:latin typeface="JetBrains Mono"/>
                 <a:ea typeface="JetBrains Mono"/>
                 <a:cs typeface="JetBrains Mono"/>
               </a:rPr>
-              <a:t>print</a:t>
+              <a:t>    print</a:t>
             </a:r>
             <a:r>
               <a:rPr sz="1600">
@@ -8694,24 +8617,13 @@
             <a:r>
               <a:rPr sz="1800">
                 <a:solidFill>
-                  <a:srgbClr val="080808"/>
-                </a:solidFill>
-                <a:latin typeface="JetBrains Mono"/>
-                <a:ea typeface="JetBrains Mono"/>
-                <a:cs typeface="JetBrains Mono"/>
-              </a:rPr>
-              <a:t>    </a:t>
-            </a:r>
-            <a:r>
-              <a:rPr sz="1800">
-                <a:solidFill>
                   <a:srgbClr val="1750EB"/>
                 </a:solidFill>
                 <a:latin typeface="JetBrains Mono"/>
                 <a:ea typeface="JetBrains Mono"/>
                 <a:cs typeface="JetBrains Mono"/>
               </a:rPr>
-              <a:t>print</a:t>
+              <a:t>    print</a:t>
             </a:r>
             <a:r>
               <a:rPr sz="1800">
